--- a/Ethical hacking.pptx
+++ b/Ethical hacking.pptx
@@ -8,6 +8,18 @@
     <p:sldId id="256" r:id="rId2"/>
     <p:sldId id="257" r:id="rId3"/>
     <p:sldId id="258" r:id="rId4"/>
+    <p:sldId id="259" r:id="rId5"/>
+    <p:sldId id="260" r:id="rId6"/>
+    <p:sldId id="261" r:id="rId7"/>
+    <p:sldId id="262" r:id="rId8"/>
+    <p:sldId id="263" r:id="rId9"/>
+    <p:sldId id="264" r:id="rId10"/>
+    <p:sldId id="265" r:id="rId11"/>
+    <p:sldId id="266" r:id="rId12"/>
+    <p:sldId id="267" r:id="rId13"/>
+    <p:sldId id="268" r:id="rId14"/>
+    <p:sldId id="269" r:id="rId15"/>
+    <p:sldId id="270" r:id="rId16"/>
   </p:sldIdLst>
   <p:sldSz cx="9144000" cy="6858000" type="screen4x3"/>
   <p:notesSz cx="6858000" cy="9144000"/>
@@ -291,7 +303,7 @@
             <a:fld id="{AD8F8F55-8874-4454-8B9A-A4E7233EC04D}" type="datetimeFigureOut">
               <a:rPr lang="en-US" smtClean="0"/>
               <a:pPr/>
-              <a:t>5/9/2026</a:t>
+              <a:t>6/4/2026</a:t>
             </a:fld>
             <a:endParaRPr lang="en-US"/>
           </a:p>
@@ -458,7 +470,7 @@
             <a:fld id="{AD8F8F55-8874-4454-8B9A-A4E7233EC04D}" type="datetimeFigureOut">
               <a:rPr lang="en-US" smtClean="0"/>
               <a:pPr/>
-              <a:t>5/9/2026</a:t>
+              <a:t>6/4/2026</a:t>
             </a:fld>
             <a:endParaRPr lang="en-US"/>
           </a:p>
@@ -635,7 +647,7 @@
             <a:fld id="{AD8F8F55-8874-4454-8B9A-A4E7233EC04D}" type="datetimeFigureOut">
               <a:rPr lang="en-US" smtClean="0"/>
               <a:pPr/>
-              <a:t>5/9/2026</a:t>
+              <a:t>6/4/2026</a:t>
             </a:fld>
             <a:endParaRPr lang="en-US"/>
           </a:p>
@@ -802,7 +814,7 @@
             <a:fld id="{AD8F8F55-8874-4454-8B9A-A4E7233EC04D}" type="datetimeFigureOut">
               <a:rPr lang="en-US" smtClean="0"/>
               <a:pPr/>
-              <a:t>5/9/2026</a:t>
+              <a:t>6/4/2026</a:t>
             </a:fld>
             <a:endParaRPr lang="en-US"/>
           </a:p>
@@ -1045,7 +1057,7 @@
             <a:fld id="{AD8F8F55-8874-4454-8B9A-A4E7233EC04D}" type="datetimeFigureOut">
               <a:rPr lang="en-US" smtClean="0"/>
               <a:pPr/>
-              <a:t>5/9/2026</a:t>
+              <a:t>6/4/2026</a:t>
             </a:fld>
             <a:endParaRPr lang="en-US"/>
           </a:p>
@@ -1330,7 +1342,7 @@
             <a:fld id="{AD8F8F55-8874-4454-8B9A-A4E7233EC04D}" type="datetimeFigureOut">
               <a:rPr lang="en-US" smtClean="0"/>
               <a:pPr/>
-              <a:t>5/9/2026</a:t>
+              <a:t>6/4/2026</a:t>
             </a:fld>
             <a:endParaRPr lang="en-US"/>
           </a:p>
@@ -1749,7 +1761,7 @@
             <a:fld id="{AD8F8F55-8874-4454-8B9A-A4E7233EC04D}" type="datetimeFigureOut">
               <a:rPr lang="en-US" smtClean="0"/>
               <a:pPr/>
-              <a:t>5/9/2026</a:t>
+              <a:t>6/4/2026</a:t>
             </a:fld>
             <a:endParaRPr lang="en-US"/>
           </a:p>
@@ -1864,7 +1876,7 @@
             <a:fld id="{AD8F8F55-8874-4454-8B9A-A4E7233EC04D}" type="datetimeFigureOut">
               <a:rPr lang="en-US" smtClean="0"/>
               <a:pPr/>
-              <a:t>5/9/2026</a:t>
+              <a:t>6/4/2026</a:t>
             </a:fld>
             <a:endParaRPr lang="en-US"/>
           </a:p>
@@ -1956,7 +1968,7 @@
             <a:fld id="{AD8F8F55-8874-4454-8B9A-A4E7233EC04D}" type="datetimeFigureOut">
               <a:rPr lang="en-US" smtClean="0"/>
               <a:pPr/>
-              <a:t>5/9/2026</a:t>
+              <a:t>6/4/2026</a:t>
             </a:fld>
             <a:endParaRPr lang="en-US"/>
           </a:p>
@@ -2230,7 +2242,7 @@
             <a:fld id="{AD8F8F55-8874-4454-8B9A-A4E7233EC04D}" type="datetimeFigureOut">
               <a:rPr lang="en-US" smtClean="0"/>
               <a:pPr/>
-              <a:t>5/9/2026</a:t>
+              <a:t>6/4/2026</a:t>
             </a:fld>
             <a:endParaRPr lang="en-US"/>
           </a:p>
@@ -2480,7 +2492,7 @@
             <a:fld id="{AD8F8F55-8874-4454-8B9A-A4E7233EC04D}" type="datetimeFigureOut">
               <a:rPr lang="en-US" smtClean="0"/>
               <a:pPr/>
-              <a:t>5/9/2026</a:t>
+              <a:t>6/4/2026</a:t>
             </a:fld>
             <a:endParaRPr lang="en-US"/>
           </a:p>
@@ -2690,7 +2702,7 @@
             <a:fld id="{AD8F8F55-8874-4454-8B9A-A4E7233EC04D}" type="datetimeFigureOut">
               <a:rPr lang="en-US" smtClean="0"/>
               <a:pPr/>
-              <a:t>5/9/2026</a:t>
+              <a:t>6/4/2026</a:t>
             </a:fld>
             <a:endParaRPr lang="en-US"/>
           </a:p>
@@ -3111,6 +3123,1279 @@
 </p:sld>
 </file>
 
+<file path=ppt/slides/slide10.xml><?xml version="1.0" encoding="utf-8"?>
+<p:sld xmlns:a="http://schemas.openxmlformats.org/drawingml/2006/main" xmlns:r="http://schemas.openxmlformats.org/officeDocument/2006/relationships" xmlns:p="http://schemas.openxmlformats.org/presentationml/2006/main">
+  <p:cSld>
+    <p:spTree>
+      <p:nvGrpSpPr>
+        <p:cNvPr id="1" name=""/>
+        <p:cNvGrpSpPr/>
+        <p:nvPr/>
+      </p:nvGrpSpPr>
+      <p:grpSpPr>
+        <a:xfrm>
+          <a:off x="0" y="0"/>
+          <a:ext cx="0" cy="0"/>
+          <a:chOff x="0" y="0"/>
+          <a:chExt cx="0" cy="0"/>
+        </a:xfrm>
+      </p:grpSpPr>
+      <p:sp>
+        <p:nvSpPr>
+          <p:cNvPr id="2" name="Title 1"/>
+          <p:cNvSpPr>
+            <a:spLocks noGrp="1"/>
+          </p:cNvSpPr>
+          <p:nvPr>
+            <p:ph type="title"/>
+          </p:nvPr>
+        </p:nvSpPr>
+        <p:spPr/>
+        <p:txBody>
+          <a:bodyPr/>
+          <a:lstStyle/>
+          <a:p>
+            <a:r>
+              <a:rPr lang="en-SG" dirty="0" smtClean="0"/>
+              <a:t>012 Network Hacking</a:t>
+            </a:r>
+            <a:endParaRPr lang="en-US" dirty="0"/>
+          </a:p>
+        </p:txBody>
+      </p:sp>
+      <p:sp>
+        <p:nvSpPr>
+          <p:cNvPr id="3" name="Content Placeholder 2"/>
+          <p:cNvSpPr>
+            <a:spLocks noGrp="1"/>
+          </p:cNvSpPr>
+          <p:nvPr>
+            <p:ph idx="1"/>
+          </p:nvPr>
+        </p:nvSpPr>
+        <p:spPr/>
+        <p:txBody>
+          <a:bodyPr/>
+          <a:lstStyle/>
+          <a:p>
+            <a:r>
+              <a:rPr lang="en-SG" dirty="0" smtClean="0"/>
+              <a:t>Need to connect to same network to gain access to other system</a:t>
+            </a:r>
+          </a:p>
+          <a:p>
+            <a:r>
+              <a:rPr lang="en-SG" dirty="0" smtClean="0"/>
+              <a:t>3 sections:</a:t>
+            </a:r>
+          </a:p>
+          <a:p>
+            <a:pPr lvl="1"/>
+            <a:r>
+              <a:rPr lang="en-SG" dirty="0" smtClean="0"/>
+              <a:t>Pre-connection </a:t>
+            </a:r>
+            <a:r>
+              <a:rPr lang="en-SG" dirty="0" err="1" smtClean="0"/>
+              <a:t>attk</a:t>
+            </a:r>
+            <a:endParaRPr lang="en-SG" dirty="0" smtClean="0"/>
+          </a:p>
+          <a:p>
+            <a:pPr lvl="1"/>
+            <a:r>
+              <a:rPr lang="en-SG" dirty="0" smtClean="0"/>
+              <a:t>Gaining access</a:t>
+            </a:r>
+          </a:p>
+          <a:p>
+            <a:pPr lvl="2"/>
+            <a:r>
+              <a:rPr lang="en-SG" dirty="0" smtClean="0"/>
+              <a:t>Crack </a:t>
+            </a:r>
+            <a:r>
+              <a:rPr lang="en-SG" dirty="0" err="1" smtClean="0"/>
+              <a:t>wifi</a:t>
+            </a:r>
+            <a:r>
+              <a:rPr lang="en-SG" dirty="0" smtClean="0"/>
+              <a:t> key</a:t>
+            </a:r>
+          </a:p>
+          <a:p>
+            <a:pPr lvl="1"/>
+            <a:r>
+              <a:rPr lang="en-SG" dirty="0" smtClean="0"/>
+              <a:t>Post connection </a:t>
+            </a:r>
+            <a:r>
+              <a:rPr lang="en-SG" dirty="0" err="1" smtClean="0"/>
+              <a:t>attk</a:t>
+            </a:r>
+            <a:endParaRPr lang="en-SG" dirty="0" smtClean="0"/>
+          </a:p>
+          <a:p>
+            <a:pPr lvl="2"/>
+            <a:r>
+              <a:rPr lang="en-SG" dirty="0" smtClean="0"/>
+              <a:t>Apply to </a:t>
+            </a:r>
+            <a:r>
+              <a:rPr lang="en-SG" dirty="0" err="1" smtClean="0"/>
+              <a:t>Wifi</a:t>
+            </a:r>
+            <a:r>
+              <a:rPr lang="en-SG" dirty="0" smtClean="0"/>
+              <a:t> or wired network</a:t>
+            </a:r>
+          </a:p>
+          <a:p>
+            <a:pPr lvl="2"/>
+            <a:r>
+              <a:rPr lang="en-SG" dirty="0" smtClean="0"/>
+              <a:t>Intercept, capture, </a:t>
+            </a:r>
+            <a:r>
+              <a:rPr lang="en-US" dirty="0" smtClean="0"/>
+              <a:t>modify data</a:t>
+            </a:r>
+            <a:endParaRPr lang="en-US" dirty="0"/>
+          </a:p>
+        </p:txBody>
+      </p:sp>
+    </p:spTree>
+  </p:cSld>
+  <p:clrMapOvr>
+    <a:masterClrMapping/>
+  </p:clrMapOvr>
+</p:sld>
+</file>
+
+<file path=ppt/slides/slide11.xml><?xml version="1.0" encoding="utf-8"?>
+<p:sld xmlns:a="http://schemas.openxmlformats.org/drawingml/2006/main" xmlns:r="http://schemas.openxmlformats.org/officeDocument/2006/relationships" xmlns:p="http://schemas.openxmlformats.org/presentationml/2006/main">
+  <p:cSld>
+    <p:spTree>
+      <p:nvGrpSpPr>
+        <p:cNvPr id="1" name=""/>
+        <p:cNvGrpSpPr/>
+        <p:nvPr/>
+      </p:nvGrpSpPr>
+      <p:grpSpPr>
+        <a:xfrm>
+          <a:off x="0" y="0"/>
+          <a:ext cx="0" cy="0"/>
+          <a:chOff x="0" y="0"/>
+          <a:chExt cx="0" cy="0"/>
+        </a:xfrm>
+      </p:grpSpPr>
+      <p:sp>
+        <p:nvSpPr>
+          <p:cNvPr id="2" name="Title 1"/>
+          <p:cNvSpPr>
+            <a:spLocks noGrp="1"/>
+          </p:cNvSpPr>
+          <p:nvPr>
+            <p:ph type="title"/>
+          </p:nvPr>
+        </p:nvSpPr>
+        <p:spPr/>
+        <p:txBody>
+          <a:bodyPr/>
+          <a:lstStyle/>
+          <a:p>
+            <a:r>
+              <a:rPr lang="en-SG" dirty="0" smtClean="0"/>
+              <a:t>013 Network basic</a:t>
+            </a:r>
+            <a:endParaRPr lang="en-US" dirty="0"/>
+          </a:p>
+        </p:txBody>
+      </p:sp>
+      <p:sp>
+        <p:nvSpPr>
+          <p:cNvPr id="3" name="Content Placeholder 2"/>
+          <p:cNvSpPr>
+            <a:spLocks noGrp="1"/>
+          </p:cNvSpPr>
+          <p:nvPr>
+            <p:ph idx="1"/>
+          </p:nvPr>
+        </p:nvSpPr>
+        <p:spPr/>
+        <p:txBody>
+          <a:bodyPr/>
+          <a:lstStyle/>
+          <a:p>
+            <a:r>
+              <a:rPr lang="en-SG" dirty="0" smtClean="0"/>
+              <a:t>Connect to network to share resources</a:t>
+            </a:r>
+          </a:p>
+          <a:p>
+            <a:r>
+              <a:rPr lang="en-SG" dirty="0" smtClean="0"/>
+              <a:t>Access point/router: only device that has direct access to Internet resource.</a:t>
+            </a:r>
+          </a:p>
+          <a:p>
+            <a:r>
+              <a:rPr lang="en-SG" dirty="0" smtClean="0"/>
+              <a:t>Communication: Request/ responses</a:t>
+            </a:r>
+            <a:endParaRPr lang="en-US" dirty="0"/>
+          </a:p>
+        </p:txBody>
+      </p:sp>
+    </p:spTree>
+  </p:cSld>
+  <p:clrMapOvr>
+    <a:masterClrMapping/>
+  </p:clrMapOvr>
+</p:sld>
+</file>
+
+<file path=ppt/slides/slide12.xml><?xml version="1.0" encoding="utf-8"?>
+<p:sld xmlns:a="http://schemas.openxmlformats.org/drawingml/2006/main" xmlns:r="http://schemas.openxmlformats.org/officeDocument/2006/relationships" xmlns:p="http://schemas.openxmlformats.org/presentationml/2006/main">
+  <p:cSld>
+    <p:spTree>
+      <p:nvGrpSpPr>
+        <p:cNvPr id="1" name=""/>
+        <p:cNvGrpSpPr/>
+        <p:nvPr/>
+      </p:nvGrpSpPr>
+      <p:grpSpPr>
+        <a:xfrm>
+          <a:off x="0" y="0"/>
+          <a:ext cx="0" cy="0"/>
+          <a:chOff x="0" y="0"/>
+          <a:chExt cx="0" cy="0"/>
+        </a:xfrm>
+      </p:grpSpPr>
+      <p:sp>
+        <p:nvSpPr>
+          <p:cNvPr id="2" name="Title 1"/>
+          <p:cNvSpPr>
+            <a:spLocks noGrp="1"/>
+          </p:cNvSpPr>
+          <p:nvPr>
+            <p:ph type="title"/>
+          </p:nvPr>
+        </p:nvSpPr>
+        <p:spPr/>
+        <p:txBody>
+          <a:bodyPr/>
+          <a:lstStyle/>
+          <a:p>
+            <a:r>
+              <a:rPr lang="en-SG" dirty="0" smtClean="0"/>
+              <a:t>014</a:t>
+            </a:r>
+            <a:endParaRPr lang="en-US" dirty="0"/>
+          </a:p>
+        </p:txBody>
+      </p:sp>
+      <p:sp>
+        <p:nvSpPr>
+          <p:cNvPr id="3" name="Content Placeholder 2"/>
+          <p:cNvSpPr>
+            <a:spLocks noGrp="1"/>
+          </p:cNvSpPr>
+          <p:nvPr>
+            <p:ph idx="1"/>
+          </p:nvPr>
+        </p:nvSpPr>
+        <p:spPr/>
+        <p:txBody>
+          <a:bodyPr>
+            <a:normAutofit fontScale="62500" lnSpcReduction="20000"/>
+          </a:bodyPr>
+          <a:lstStyle/>
+          <a:p>
+            <a:r>
+              <a:rPr lang="en-SG" dirty="0" smtClean="0"/>
+              <a:t>Wireless adapter for WEP cracking and WPA/WPA2 cracking</a:t>
+            </a:r>
+          </a:p>
+          <a:p>
+            <a:r>
+              <a:rPr lang="en-SG" dirty="0" smtClean="0"/>
+              <a:t>Add USB Controller to </a:t>
+            </a:r>
+            <a:r>
+              <a:rPr lang="en-SG" dirty="0" err="1" smtClean="0"/>
+              <a:t>ur</a:t>
+            </a:r>
+            <a:r>
+              <a:rPr lang="en-SG" dirty="0" smtClean="0"/>
+              <a:t> VM if it is not added yet</a:t>
+            </a:r>
+            <a:r>
+              <a:rPr lang="en-SG" dirty="0" smtClean="0"/>
+              <a:t>. Select USB 3.1. USB2 cannot work.</a:t>
+            </a:r>
+            <a:endParaRPr lang="en-SG" dirty="0" smtClean="0"/>
+          </a:p>
+          <a:p>
+            <a:r>
+              <a:rPr lang="en-SG" dirty="0" smtClean="0"/>
+              <a:t>My </a:t>
+            </a:r>
+            <a:r>
+              <a:rPr lang="en-SG" dirty="0" err="1" smtClean="0"/>
+              <a:t>wifi</a:t>
+            </a:r>
+            <a:r>
+              <a:rPr lang="en-SG" dirty="0" smtClean="0"/>
+              <a:t> chipset is inbuilt into my motherboard, cannot be seen by </a:t>
+            </a:r>
+            <a:r>
+              <a:rPr lang="en-SG" dirty="0" err="1" smtClean="0"/>
+              <a:t>Vmware</a:t>
+            </a:r>
+            <a:r>
+              <a:rPr lang="en-SG" dirty="0" smtClean="0"/>
+              <a:t>. Need to buy USB </a:t>
+            </a:r>
+            <a:r>
+              <a:rPr lang="en-SG" dirty="0" err="1" smtClean="0"/>
+              <a:t>wifi</a:t>
+            </a:r>
+            <a:r>
+              <a:rPr lang="en-SG" dirty="0" smtClean="0"/>
+              <a:t> adapter</a:t>
+            </a:r>
+            <a:r>
+              <a:rPr lang="en-SG" dirty="0" smtClean="0"/>
+              <a:t>.</a:t>
+            </a:r>
+          </a:p>
+          <a:p>
+            <a:r>
+              <a:rPr lang="en-SG" dirty="0" smtClean="0"/>
+              <a:t>Brand does not matter. Chipset matters.</a:t>
+            </a:r>
+          </a:p>
+          <a:p>
+            <a:pPr lvl="1"/>
+            <a:r>
+              <a:rPr lang="en-SG" dirty="0" err="1" smtClean="0"/>
+              <a:t>RealTek</a:t>
+            </a:r>
+            <a:r>
+              <a:rPr lang="en-SG" dirty="0" smtClean="0"/>
+              <a:t> RTL8812AU</a:t>
+            </a:r>
+          </a:p>
+          <a:p>
+            <a:pPr lvl="1"/>
+            <a:r>
+              <a:rPr lang="en-SG" dirty="0" err="1" smtClean="0"/>
+              <a:t>Atheros</a:t>
+            </a:r>
+            <a:r>
+              <a:rPr lang="en-SG" dirty="0" smtClean="0"/>
+              <a:t> AR9271</a:t>
+            </a:r>
+          </a:p>
+          <a:p>
+            <a:r>
+              <a:rPr lang="en-SG" dirty="0" smtClean="0"/>
+              <a:t>Wireless adapter requirements:</a:t>
+            </a:r>
+          </a:p>
+          <a:p>
+            <a:pPr lvl="1"/>
+            <a:r>
+              <a:rPr lang="en-SG" dirty="0" smtClean="0"/>
+              <a:t>Monitor mode</a:t>
+            </a:r>
+          </a:p>
+          <a:p>
+            <a:pPr lvl="1"/>
+            <a:r>
+              <a:rPr lang="en-SG" dirty="0" smtClean="0"/>
+              <a:t>Packet injection mode</a:t>
+            </a:r>
+          </a:p>
+          <a:p>
+            <a:pPr lvl="1"/>
+            <a:r>
+              <a:rPr lang="en-SG" dirty="0" smtClean="0"/>
+              <a:t>AP mode</a:t>
+            </a:r>
+          </a:p>
+          <a:p>
+            <a:r>
+              <a:rPr lang="en-SG" dirty="0" smtClean="0"/>
+              <a:t>Start kali first b4 connecting </a:t>
+            </a:r>
+            <a:r>
+              <a:rPr lang="en-SG" dirty="0" err="1" smtClean="0"/>
+              <a:t>wifi</a:t>
+            </a:r>
+            <a:r>
+              <a:rPr lang="en-SG" dirty="0" smtClean="0"/>
+              <a:t> adapter.</a:t>
+            </a:r>
+          </a:p>
+          <a:p>
+            <a:r>
+              <a:rPr lang="en-SG" dirty="0" smtClean="0"/>
+              <a:t>Select connect to virtual machine in host environment instead of to host.</a:t>
+            </a:r>
+          </a:p>
+          <a:p>
+            <a:r>
+              <a:rPr lang="en-SG" dirty="0" err="1" smtClean="0"/>
+              <a:t>Ifconfig</a:t>
+            </a:r>
+            <a:r>
+              <a:rPr lang="en-SG" dirty="0" smtClean="0"/>
+              <a:t> to see wlan0</a:t>
+            </a:r>
+            <a:endParaRPr lang="en-US" dirty="0"/>
+          </a:p>
+        </p:txBody>
+      </p:sp>
+    </p:spTree>
+  </p:cSld>
+  <p:clrMapOvr>
+    <a:masterClrMapping/>
+  </p:clrMapOvr>
+</p:sld>
+</file>
+
+<file path=ppt/slides/slide13.xml><?xml version="1.0" encoding="utf-8"?>
+<p:sld xmlns:a="http://schemas.openxmlformats.org/drawingml/2006/main" xmlns:r="http://schemas.openxmlformats.org/officeDocument/2006/relationships" xmlns:p="http://schemas.openxmlformats.org/presentationml/2006/main">
+  <p:cSld>
+    <p:spTree>
+      <p:nvGrpSpPr>
+        <p:cNvPr id="1" name=""/>
+        <p:cNvGrpSpPr/>
+        <p:nvPr/>
+      </p:nvGrpSpPr>
+      <p:grpSpPr>
+        <a:xfrm>
+          <a:off x="0" y="0"/>
+          <a:ext cx="0" cy="0"/>
+          <a:chOff x="0" y="0"/>
+          <a:chExt cx="0" cy="0"/>
+        </a:xfrm>
+      </p:grpSpPr>
+      <p:sp>
+        <p:nvSpPr>
+          <p:cNvPr id="2" name="Title 1"/>
+          <p:cNvSpPr>
+            <a:spLocks noGrp="1"/>
+          </p:cNvSpPr>
+          <p:nvPr>
+            <p:ph type="title"/>
+          </p:nvPr>
+        </p:nvSpPr>
+        <p:spPr/>
+        <p:txBody>
+          <a:bodyPr/>
+          <a:lstStyle/>
+          <a:p>
+            <a:r>
+              <a:rPr lang="en-US" dirty="0" smtClean="0"/>
+              <a:t>015 MAC address</a:t>
+            </a:r>
+            <a:endParaRPr lang="en-US" dirty="0"/>
+          </a:p>
+        </p:txBody>
+      </p:sp>
+      <p:sp>
+        <p:nvSpPr>
+          <p:cNvPr id="3" name="Content Placeholder 2"/>
+          <p:cNvSpPr>
+            <a:spLocks noGrp="1"/>
+          </p:cNvSpPr>
+          <p:nvPr>
+            <p:ph idx="1"/>
+          </p:nvPr>
+        </p:nvSpPr>
+        <p:spPr/>
+        <p:txBody>
+          <a:bodyPr>
+            <a:normAutofit fontScale="77500" lnSpcReduction="20000"/>
+          </a:bodyPr>
+          <a:lstStyle/>
+          <a:p>
+            <a:r>
+              <a:rPr lang="en-US" dirty="0" smtClean="0"/>
+              <a:t>Media Access Control</a:t>
+            </a:r>
+          </a:p>
+          <a:p>
+            <a:pPr lvl="1"/>
+            <a:r>
+              <a:rPr lang="en-US" dirty="0" smtClean="0"/>
+              <a:t>Physical (hw)</a:t>
+            </a:r>
+          </a:p>
+          <a:p>
+            <a:pPr lvl="1"/>
+            <a:r>
+              <a:rPr lang="en-US" dirty="0" smtClean="0"/>
+              <a:t>Unique (not true as can be modified)</a:t>
+            </a:r>
+          </a:p>
+          <a:p>
+            <a:r>
+              <a:rPr lang="en-US" dirty="0" smtClean="0"/>
+              <a:t>Assigned by manufacturer</a:t>
+            </a:r>
+          </a:p>
+          <a:p>
+            <a:r>
+              <a:rPr lang="en-US" dirty="0" smtClean="0"/>
+              <a:t>Purpose of changing it:</a:t>
+            </a:r>
+          </a:p>
+          <a:p>
+            <a:pPr lvl="1"/>
+            <a:r>
+              <a:rPr lang="en-US" dirty="0" smtClean="0"/>
+              <a:t>Increase anonymity (hide identity)</a:t>
+            </a:r>
+          </a:p>
+          <a:p>
+            <a:pPr lvl="1"/>
+            <a:r>
+              <a:rPr lang="en-US" dirty="0" smtClean="0"/>
+              <a:t>Impersonate other device</a:t>
+            </a:r>
+          </a:p>
+          <a:p>
+            <a:pPr lvl="2"/>
+            <a:r>
+              <a:rPr lang="en-US" dirty="0" smtClean="0"/>
+              <a:t>Bypass filter</a:t>
+            </a:r>
+          </a:p>
+          <a:p>
+            <a:r>
+              <a:rPr lang="en-US" dirty="0" err="1" smtClean="0"/>
+              <a:t>Ifconfig</a:t>
+            </a:r>
+            <a:endParaRPr lang="en-US" dirty="0" smtClean="0"/>
+          </a:p>
+          <a:p>
+            <a:pPr lvl="1"/>
+            <a:r>
+              <a:rPr lang="en-US" dirty="0" smtClean="0"/>
+              <a:t>Ether </a:t>
+            </a:r>
+            <a:r>
+              <a:rPr lang="en-US" dirty="0" err="1" smtClean="0"/>
+              <a:t>xx:xx:xx:xx:xx:xx</a:t>
+            </a:r>
+            <a:endParaRPr lang="en-US" dirty="0" smtClean="0"/>
+          </a:p>
+          <a:p>
+            <a:pPr lvl="1"/>
+            <a:r>
+              <a:rPr lang="en-US" dirty="0" smtClean="0"/>
+              <a:t>Must be connected to network to have </a:t>
+            </a:r>
+            <a:r>
+              <a:rPr lang="en-US" dirty="0" err="1" smtClean="0"/>
+              <a:t>ip</a:t>
+            </a:r>
+            <a:r>
+              <a:rPr lang="en-US" dirty="0" smtClean="0"/>
+              <a:t> </a:t>
+            </a:r>
+            <a:r>
+              <a:rPr lang="en-US" dirty="0" err="1" smtClean="0"/>
+              <a:t>addr</a:t>
+            </a:r>
+            <a:endParaRPr lang="en-US" dirty="0" smtClean="0"/>
+          </a:p>
+          <a:p>
+            <a:pPr lvl="2"/>
+            <a:r>
+              <a:rPr lang="en-SG" dirty="0" smtClean="0"/>
+              <a:t>Lo (loopback) does not have</a:t>
+            </a:r>
+          </a:p>
+          <a:p>
+            <a:pPr lvl="2"/>
+            <a:r>
+              <a:rPr lang="en-SG" dirty="0" smtClean="0"/>
+              <a:t>Wlan0 does not have since not connected to </a:t>
+            </a:r>
+            <a:r>
+              <a:rPr lang="en-SG" dirty="0" err="1" smtClean="0"/>
+              <a:t>wifi</a:t>
+            </a:r>
+            <a:r>
+              <a:rPr lang="en-SG" dirty="0" smtClean="0"/>
+              <a:t> AP</a:t>
+            </a:r>
+            <a:endParaRPr lang="en-US" dirty="0" smtClean="0"/>
+          </a:p>
+          <a:p>
+            <a:pPr lvl="1"/>
+            <a:endParaRPr lang="en-US" dirty="0"/>
+          </a:p>
+        </p:txBody>
+      </p:sp>
+    </p:spTree>
+  </p:cSld>
+  <p:clrMapOvr>
+    <a:masterClrMapping/>
+  </p:clrMapOvr>
+</p:sld>
+</file>
+
+<file path=ppt/slides/slide14.xml><?xml version="1.0" encoding="utf-8"?>
+<p:sld xmlns:a="http://schemas.openxmlformats.org/drawingml/2006/main" xmlns:r="http://schemas.openxmlformats.org/officeDocument/2006/relationships" xmlns:p="http://schemas.openxmlformats.org/presentationml/2006/main">
+  <p:cSld>
+    <p:spTree>
+      <p:nvGrpSpPr>
+        <p:cNvPr id="1" name=""/>
+        <p:cNvGrpSpPr/>
+        <p:nvPr/>
+      </p:nvGrpSpPr>
+      <p:grpSpPr>
+        <a:xfrm>
+          <a:off x="0" y="0"/>
+          <a:ext cx="0" cy="0"/>
+          <a:chOff x="0" y="0"/>
+          <a:chExt cx="0" cy="0"/>
+        </a:xfrm>
+      </p:grpSpPr>
+      <p:sp>
+        <p:nvSpPr>
+          <p:cNvPr id="2" name="Title 1"/>
+          <p:cNvSpPr>
+            <a:spLocks noGrp="1"/>
+          </p:cNvSpPr>
+          <p:nvPr>
+            <p:ph type="title"/>
+          </p:nvPr>
+        </p:nvSpPr>
+        <p:spPr/>
+        <p:txBody>
+          <a:bodyPr/>
+          <a:lstStyle/>
+          <a:p>
+            <a:r>
+              <a:rPr lang="en-US" dirty="0" smtClean="0"/>
+              <a:t>Change </a:t>
+            </a:r>
+            <a:r>
+              <a:rPr lang="en-US" dirty="0" err="1" smtClean="0"/>
+              <a:t>mac</a:t>
+            </a:r>
+            <a:r>
+              <a:rPr lang="en-US" dirty="0" smtClean="0"/>
+              <a:t> address</a:t>
+            </a:r>
+            <a:endParaRPr lang="en-US" dirty="0"/>
+          </a:p>
+        </p:txBody>
+      </p:sp>
+      <p:sp>
+        <p:nvSpPr>
+          <p:cNvPr id="3" name="Content Placeholder 2"/>
+          <p:cNvSpPr>
+            <a:spLocks noGrp="1"/>
+          </p:cNvSpPr>
+          <p:nvPr>
+            <p:ph idx="1"/>
+          </p:nvPr>
+        </p:nvSpPr>
+        <p:spPr/>
+        <p:txBody>
+          <a:bodyPr>
+            <a:normAutofit fontScale="32500" lnSpcReduction="20000"/>
+          </a:bodyPr>
+          <a:lstStyle/>
+          <a:p>
+            <a:r>
+              <a:rPr lang="en-US" dirty="0" err="1" smtClean="0"/>
+              <a:t>Ifconfig</a:t>
+            </a:r>
+            <a:r>
+              <a:rPr lang="en-US" dirty="0" smtClean="0"/>
+              <a:t> &lt;</a:t>
+            </a:r>
+            <a:r>
+              <a:rPr lang="en-US" dirty="0" err="1" smtClean="0"/>
+              <a:t>interface_name</a:t>
+            </a:r>
+            <a:r>
+              <a:rPr lang="en-US" dirty="0" smtClean="0"/>
+              <a:t>&gt; down: disable</a:t>
+            </a:r>
+          </a:p>
+          <a:p>
+            <a:r>
+              <a:rPr lang="en-US" dirty="0" err="1" smtClean="0"/>
+              <a:t>Ifconfig</a:t>
+            </a:r>
+            <a:r>
+              <a:rPr lang="en-US" dirty="0" smtClean="0"/>
+              <a:t> &lt;</a:t>
+            </a:r>
+            <a:r>
+              <a:rPr lang="en-US" dirty="0" err="1" smtClean="0"/>
+              <a:t>interface_name</a:t>
+            </a:r>
+            <a:r>
+              <a:rPr lang="en-US" dirty="0" smtClean="0"/>
+              <a:t>&gt; hw ether &lt;</a:t>
+            </a:r>
+            <a:r>
+              <a:rPr lang="en-US" dirty="0" err="1" smtClean="0"/>
+              <a:t>ne:wm:ac:dd:re:ss</a:t>
+            </a:r>
+            <a:r>
+              <a:rPr lang="en-US" dirty="0" smtClean="0"/>
+              <a:t>&gt;: change. May fail if NIC does not allow MAC spoofing or VM with MAC locked by hypervisor</a:t>
+            </a:r>
+            <a:r>
+              <a:rPr lang="en-US" dirty="0" smtClean="0"/>
+              <a:t>.</a:t>
+            </a:r>
+          </a:p>
+          <a:p>
+            <a:r>
+              <a:rPr lang="en-SG" dirty="0" smtClean="0"/>
+              <a:t>Y spoofed </a:t>
+            </a:r>
+            <a:r>
+              <a:rPr lang="en-SG" dirty="0" err="1" smtClean="0"/>
+              <a:t>mac</a:t>
+            </a:r>
+            <a:r>
+              <a:rPr lang="en-SG" dirty="0" smtClean="0"/>
+              <a:t> address need to start with 00?</a:t>
+            </a:r>
+          </a:p>
+          <a:p>
+            <a:pPr lvl="1"/>
+            <a:r>
+              <a:rPr lang="en-SG" dirty="0" smtClean="0"/>
+              <a:t>Does not need.</a:t>
+            </a:r>
+          </a:p>
+          <a:p>
+            <a:pPr lvl="1"/>
+            <a:r>
+              <a:rPr lang="en-SG" dirty="0" smtClean="0"/>
+              <a:t>There are rules for first Byte of MAC address</a:t>
+            </a:r>
+          </a:p>
+          <a:p>
+            <a:pPr lvl="1"/>
+            <a:r>
+              <a:rPr lang="en-SG" dirty="0" smtClean="0"/>
+              <a:t>LSb0: 0 (</a:t>
+            </a:r>
+            <a:r>
+              <a:rPr lang="en-SG" dirty="0" err="1" smtClean="0"/>
+              <a:t>unicast</a:t>
+            </a:r>
+            <a:r>
+              <a:rPr lang="en-SG" dirty="0" smtClean="0"/>
+              <a:t> address). Network adapter cannot use multicast address as their own MAC.</a:t>
+            </a:r>
+          </a:p>
+          <a:p>
+            <a:pPr lvl="1"/>
+            <a:r>
+              <a:rPr lang="en-SG" dirty="0" smtClean="0"/>
+              <a:t>LSb1: 1 (locally Administered): Indicate it </a:t>
+            </a:r>
+            <a:r>
+              <a:rPr lang="en-SG" dirty="0" err="1" smtClean="0"/>
+              <a:t>isnt</a:t>
+            </a:r>
+            <a:r>
+              <a:rPr lang="en-SG" dirty="0" smtClean="0"/>
+              <a:t> part of vendor-assigned namespace. Not needed.</a:t>
+            </a:r>
+            <a:endParaRPr lang="en-US" dirty="0" smtClean="0"/>
+          </a:p>
+          <a:p>
+            <a:r>
+              <a:rPr lang="en-US" dirty="0" err="1" smtClean="0"/>
+              <a:t>Ifconfig</a:t>
+            </a:r>
+            <a:r>
+              <a:rPr lang="en-US" dirty="0" smtClean="0"/>
+              <a:t> &lt;</a:t>
+            </a:r>
+            <a:r>
+              <a:rPr lang="en-US" dirty="0" err="1" smtClean="0"/>
+              <a:t>interface_name</a:t>
+            </a:r>
+            <a:r>
+              <a:rPr lang="en-US" dirty="0" smtClean="0"/>
+              <a:t>&gt; up: enable</a:t>
+            </a:r>
+          </a:p>
+          <a:p>
+            <a:r>
+              <a:rPr lang="en-US" dirty="0" smtClean="0"/>
+              <a:t>Change back to original when restart the PC. Only change it in memory. Not changing the actual </a:t>
+            </a:r>
+            <a:r>
+              <a:rPr lang="en-US" dirty="0" err="1" smtClean="0"/>
+              <a:t>mac</a:t>
+            </a:r>
+            <a:r>
+              <a:rPr lang="en-US" dirty="0" smtClean="0"/>
+              <a:t> address.</a:t>
+            </a:r>
+          </a:p>
+          <a:p>
+            <a:r>
+              <a:rPr lang="en-US" dirty="0" smtClean="0"/>
+              <a:t>If change back without restarting PC, it is the network </a:t>
+            </a:r>
+            <a:r>
+              <a:rPr lang="en-US" dirty="0" smtClean="0"/>
+              <a:t>manager&gt; To prevent that, do the following:</a:t>
+            </a:r>
+          </a:p>
+          <a:p>
+            <a:pPr lvl="1"/>
+            <a:r>
+              <a:rPr lang="en-US" smtClean="0">
+                <a:hlinkClick r:id="rId2"/>
+              </a:rPr>
+              <a:t>https</a:t>
+            </a:r>
+            <a:r>
+              <a:rPr lang="en-US" smtClean="0">
+                <a:hlinkClick r:id="rId2"/>
+              </a:rPr>
+              <a:t>://</a:t>
+            </a:r>
+            <a:r>
+              <a:rPr lang="en-US" smtClean="0">
+                <a:hlinkClick r:id="rId2"/>
+              </a:rPr>
+              <a:t>www.youtube.com/watch?v=7AUGQNBCddo</a:t>
+            </a:r>
+            <a:endParaRPr lang="en-US" smtClean="0"/>
+          </a:p>
+          <a:p>
+            <a:pPr lvl="1"/>
+            <a:r>
+              <a:rPr lang="en-US" smtClean="0"/>
+              <a:t>leafpad</a:t>
+            </a:r>
+            <a:r>
+              <a:rPr lang="en-US" dirty="0" smtClean="0"/>
+              <a:t> </a:t>
+            </a:r>
+            <a:r>
+              <a:rPr lang="en-US" dirty="0" smtClean="0"/>
+              <a:t>/</a:t>
+            </a:r>
+            <a:r>
+              <a:rPr lang="en-US" dirty="0" smtClean="0"/>
+              <a:t>etc/</a:t>
+            </a:r>
+            <a:r>
+              <a:rPr lang="en-US" dirty="0" err="1" smtClean="0"/>
+              <a:t>NetworkManager</a:t>
+            </a:r>
+            <a:r>
+              <a:rPr lang="en-US" dirty="0" smtClean="0"/>
+              <a:t>/</a:t>
+            </a:r>
+            <a:r>
+              <a:rPr lang="en-US" dirty="0" err="1" smtClean="0"/>
+              <a:t>NetworkManager.conf</a:t>
+            </a:r>
+            <a:endParaRPr lang="en-US" dirty="0" smtClean="0"/>
+          </a:p>
+          <a:p>
+            <a:pPr lvl="1"/>
+            <a:r>
+              <a:rPr lang="en-SG" dirty="0" smtClean="0"/>
+              <a:t>Add the following inside</a:t>
+            </a:r>
+          </a:p>
+          <a:p>
+            <a:pPr lvl="2"/>
+            <a:r>
+              <a:rPr lang="en-US" dirty="0" smtClean="0"/>
+              <a:t>[main]</a:t>
+            </a:r>
+          </a:p>
+          <a:p>
+            <a:pPr lvl="2"/>
+            <a:r>
+              <a:rPr lang="en-US" dirty="0" err="1" smtClean="0"/>
+              <a:t>plugins</a:t>
+            </a:r>
+            <a:r>
+              <a:rPr lang="en-US" dirty="0" smtClean="0"/>
+              <a:t>=</a:t>
+            </a:r>
+            <a:r>
+              <a:rPr lang="en-US" dirty="0" err="1" smtClean="0"/>
+              <a:t>ifupdown,keyfile</a:t>
+            </a:r>
+            <a:endParaRPr lang="en-US" dirty="0" smtClean="0"/>
+          </a:p>
+          <a:p>
+            <a:pPr lvl="2"/>
+            <a:endParaRPr lang="en-US" dirty="0" smtClean="0"/>
+          </a:p>
+          <a:p>
+            <a:pPr lvl="2"/>
+            <a:r>
+              <a:rPr lang="en-US" dirty="0" smtClean="0"/>
+              <a:t>[</a:t>
+            </a:r>
+            <a:r>
+              <a:rPr lang="en-US" dirty="0" err="1" smtClean="0"/>
+              <a:t>ifupdown</a:t>
+            </a:r>
+            <a:r>
+              <a:rPr lang="en-US" dirty="0" smtClean="0"/>
+              <a:t>]</a:t>
+            </a:r>
+          </a:p>
+          <a:p>
+            <a:pPr lvl="2"/>
+            <a:r>
+              <a:rPr lang="en-US" dirty="0" smtClean="0"/>
+              <a:t>managed=false</a:t>
+            </a:r>
+          </a:p>
+          <a:p>
+            <a:pPr lvl="2"/>
+            <a:endParaRPr lang="en-US" dirty="0" smtClean="0"/>
+          </a:p>
+          <a:p>
+            <a:pPr lvl="2"/>
+            <a:r>
+              <a:rPr lang="en-US" dirty="0" smtClean="0">
+                <a:solidFill>
+                  <a:srgbClr val="FF0000"/>
+                </a:solidFill>
+              </a:rPr>
+              <a:t>[device]</a:t>
+            </a:r>
+          </a:p>
+          <a:p>
+            <a:pPr lvl="2"/>
+            <a:r>
+              <a:rPr lang="en-US" dirty="0" err="1" smtClean="0">
+                <a:solidFill>
+                  <a:srgbClr val="FF0000"/>
+                </a:solidFill>
+              </a:rPr>
+              <a:t>wifi.scan</a:t>
+            </a:r>
+            <a:r>
+              <a:rPr lang="en-US" dirty="0" smtClean="0">
+                <a:solidFill>
+                  <a:srgbClr val="FF0000"/>
+                </a:solidFill>
+              </a:rPr>
+              <a:t>-rand-</a:t>
+            </a:r>
+            <a:r>
+              <a:rPr lang="en-US" dirty="0" err="1" smtClean="0">
+                <a:solidFill>
+                  <a:srgbClr val="FF0000"/>
+                </a:solidFill>
+              </a:rPr>
+              <a:t>mac</a:t>
+            </a:r>
+            <a:r>
+              <a:rPr lang="en-US" dirty="0" smtClean="0">
+                <a:solidFill>
+                  <a:srgbClr val="FF0000"/>
+                </a:solidFill>
+              </a:rPr>
+              <a:t>-address=no</a:t>
+            </a:r>
+          </a:p>
+          <a:p>
+            <a:pPr lvl="2"/>
+            <a:endParaRPr lang="en-US" dirty="0" smtClean="0">
+              <a:solidFill>
+                <a:srgbClr val="FF0000"/>
+              </a:solidFill>
+            </a:endParaRPr>
+          </a:p>
+          <a:p>
+            <a:pPr lvl="2"/>
+            <a:r>
+              <a:rPr lang="en-US" dirty="0" smtClean="0">
+                <a:solidFill>
+                  <a:srgbClr val="FF0000"/>
+                </a:solidFill>
+              </a:rPr>
+              <a:t>[connection]</a:t>
+            </a:r>
+          </a:p>
+          <a:p>
+            <a:pPr lvl="2"/>
+            <a:r>
+              <a:rPr lang="en-US" dirty="0" err="1" smtClean="0">
+                <a:solidFill>
+                  <a:srgbClr val="FF0000"/>
+                </a:solidFill>
+              </a:rPr>
+              <a:t>ethernet.cloned</a:t>
+            </a:r>
+            <a:r>
+              <a:rPr lang="en-US" dirty="0" smtClean="0">
+                <a:solidFill>
+                  <a:srgbClr val="FF0000"/>
+                </a:solidFill>
+              </a:rPr>
+              <a:t>-</a:t>
+            </a:r>
+            <a:r>
+              <a:rPr lang="en-US" dirty="0" err="1" smtClean="0">
+                <a:solidFill>
+                  <a:srgbClr val="FF0000"/>
+                </a:solidFill>
+              </a:rPr>
+              <a:t>mac</a:t>
+            </a:r>
+            <a:r>
+              <a:rPr lang="en-US" dirty="0" smtClean="0">
+                <a:solidFill>
+                  <a:srgbClr val="FF0000"/>
+                </a:solidFill>
+              </a:rPr>
+              <a:t>-address=preserve</a:t>
+            </a:r>
+          </a:p>
+          <a:p>
+            <a:pPr lvl="2"/>
+            <a:r>
+              <a:rPr lang="en-US" dirty="0" err="1" smtClean="0">
+                <a:solidFill>
+                  <a:srgbClr val="FF0000"/>
+                </a:solidFill>
+              </a:rPr>
+              <a:t>wifi.cloned</a:t>
+            </a:r>
+            <a:r>
+              <a:rPr lang="en-US" dirty="0" smtClean="0">
+                <a:solidFill>
+                  <a:srgbClr val="FF0000"/>
+                </a:solidFill>
+              </a:rPr>
+              <a:t>-</a:t>
+            </a:r>
+            <a:r>
+              <a:rPr lang="en-US" dirty="0" err="1" smtClean="0">
+                <a:solidFill>
+                  <a:srgbClr val="FF0000"/>
+                </a:solidFill>
+              </a:rPr>
+              <a:t>mac</a:t>
+            </a:r>
+            <a:r>
+              <a:rPr lang="en-US" dirty="0" smtClean="0">
+                <a:solidFill>
+                  <a:srgbClr val="FF0000"/>
+                </a:solidFill>
+              </a:rPr>
+              <a:t>-address=preserve</a:t>
+            </a:r>
+          </a:p>
+          <a:p>
+            <a:pPr lvl="1"/>
+            <a:r>
+              <a:rPr lang="en-SG" dirty="0" smtClean="0"/>
+              <a:t>service </a:t>
+            </a:r>
+            <a:r>
+              <a:rPr lang="en-SG" dirty="0" err="1" smtClean="0"/>
+              <a:t>NetworkManager</a:t>
+            </a:r>
+            <a:r>
+              <a:rPr lang="en-SG" dirty="0" smtClean="0"/>
+              <a:t> restart</a:t>
+            </a:r>
+          </a:p>
+        </p:txBody>
+      </p:sp>
+    </p:spTree>
+  </p:cSld>
+  <p:clrMapOvr>
+    <a:masterClrMapping/>
+  </p:clrMapOvr>
+</p:sld>
+</file>
+
+<file path=ppt/slides/slide15.xml><?xml version="1.0" encoding="utf-8"?>
+<p:sld xmlns:a="http://schemas.openxmlformats.org/drawingml/2006/main" xmlns:r="http://schemas.openxmlformats.org/officeDocument/2006/relationships" xmlns:p="http://schemas.openxmlformats.org/presentationml/2006/main">
+  <p:cSld>
+    <p:spTree>
+      <p:nvGrpSpPr>
+        <p:cNvPr id="1" name=""/>
+        <p:cNvGrpSpPr/>
+        <p:nvPr/>
+      </p:nvGrpSpPr>
+      <p:grpSpPr>
+        <a:xfrm>
+          <a:off x="0" y="0"/>
+          <a:ext cx="0" cy="0"/>
+          <a:chOff x="0" y="0"/>
+          <a:chExt cx="0" cy="0"/>
+        </a:xfrm>
+      </p:grpSpPr>
+      <p:sp>
+        <p:nvSpPr>
+          <p:cNvPr id="2" name="Title 1"/>
+          <p:cNvSpPr>
+            <a:spLocks noGrp="1"/>
+          </p:cNvSpPr>
+          <p:nvPr>
+            <p:ph type="title"/>
+          </p:nvPr>
+        </p:nvSpPr>
+        <p:spPr/>
+        <p:txBody>
+          <a:bodyPr/>
+          <a:lstStyle/>
+          <a:p>
+            <a:r>
+              <a:rPr lang="en-US" dirty="0" smtClean="0"/>
+              <a:t>16</a:t>
+            </a:r>
+            <a:endParaRPr lang="en-US" dirty="0"/>
+          </a:p>
+        </p:txBody>
+      </p:sp>
+      <p:sp>
+        <p:nvSpPr>
+          <p:cNvPr id="3" name="Content Placeholder 2"/>
+          <p:cNvSpPr>
+            <a:spLocks noGrp="1"/>
+          </p:cNvSpPr>
+          <p:nvPr>
+            <p:ph idx="1"/>
+          </p:nvPr>
+        </p:nvSpPr>
+        <p:spPr/>
+        <p:txBody>
+          <a:bodyPr>
+            <a:normAutofit fontScale="77500" lnSpcReduction="20000"/>
+          </a:bodyPr>
+          <a:lstStyle/>
+          <a:p>
+            <a:r>
+              <a:rPr lang="en-US" dirty="0" smtClean="0"/>
+              <a:t>Packet flows from source </a:t>
+            </a:r>
+            <a:r>
+              <a:rPr lang="en-US" dirty="0" err="1" smtClean="0"/>
+              <a:t>mac</a:t>
+            </a:r>
+            <a:r>
+              <a:rPr lang="en-US" dirty="0" smtClean="0"/>
+              <a:t> to des </a:t>
+            </a:r>
+            <a:r>
+              <a:rPr lang="en-US" dirty="0" err="1" smtClean="0"/>
+              <a:t>mac</a:t>
+            </a:r>
+            <a:r>
+              <a:rPr lang="en-US" dirty="0" smtClean="0"/>
+              <a:t> in wired network</a:t>
+            </a:r>
+          </a:p>
+          <a:p>
+            <a:r>
+              <a:rPr lang="en-US" dirty="0" err="1" smtClean="0"/>
+              <a:t>Iwconfig</a:t>
+            </a:r>
+            <a:r>
+              <a:rPr lang="en-US" dirty="0" smtClean="0"/>
+              <a:t>: configure wireless network interface</a:t>
+            </a:r>
+          </a:p>
+          <a:p>
+            <a:pPr lvl="1"/>
+            <a:r>
+              <a:rPr lang="en-US" dirty="0" smtClean="0"/>
+              <a:t>Mode: Managed (default) only capture packet that is </a:t>
+            </a:r>
+            <a:r>
+              <a:rPr lang="en-US" dirty="0" err="1" smtClean="0"/>
+              <a:t>destinated</a:t>
+            </a:r>
+            <a:r>
+              <a:rPr lang="en-US" dirty="0" smtClean="0"/>
+              <a:t> to it.</a:t>
+            </a:r>
+          </a:p>
+          <a:p>
+            <a:r>
+              <a:rPr lang="en-US" dirty="0" smtClean="0"/>
+              <a:t>But for wireless network, u can access all packet as they are in the air. Set to monitor mode. Not all wireless adapter support monitor mode.</a:t>
+            </a:r>
+          </a:p>
+          <a:p>
+            <a:pPr lvl="1"/>
+            <a:r>
+              <a:rPr lang="en-US" dirty="0" smtClean="0"/>
+              <a:t>Down wireless interface</a:t>
+            </a:r>
+          </a:p>
+          <a:p>
+            <a:pPr lvl="1"/>
+            <a:r>
+              <a:rPr lang="en-US" dirty="0" err="1" smtClean="0"/>
+              <a:t>Airmon-ng</a:t>
+            </a:r>
+            <a:r>
+              <a:rPr lang="en-US" dirty="0" smtClean="0"/>
+              <a:t> check kill: kill network manager. Don’t rely on it for internet.</a:t>
+            </a:r>
+          </a:p>
+          <a:p>
+            <a:pPr lvl="1"/>
+            <a:r>
+              <a:rPr lang="en-US" dirty="0" err="1" smtClean="0"/>
+              <a:t>Iwconfig</a:t>
+            </a:r>
+            <a:r>
+              <a:rPr lang="en-US" dirty="0" smtClean="0"/>
+              <a:t> &lt;interface name&gt; mode monitor</a:t>
+            </a:r>
+          </a:p>
+          <a:p>
+            <a:pPr lvl="1"/>
+            <a:r>
+              <a:rPr lang="en-US" dirty="0" smtClean="0"/>
+              <a:t>Up wireless interface</a:t>
+            </a:r>
+          </a:p>
+          <a:p>
+            <a:endParaRPr lang="en-US" dirty="0"/>
+          </a:p>
+        </p:txBody>
+      </p:sp>
+    </p:spTree>
+  </p:cSld>
+  <p:clrMapOvr>
+    <a:masterClrMapping/>
+  </p:clrMapOvr>
+</p:sld>
+</file>
+
 <file path=ppt/slides/slide2.xml><?xml version="1.0" encoding="utf-8"?>
 <p:sld xmlns:a="http://schemas.openxmlformats.org/drawingml/2006/main" xmlns:r="http://schemas.openxmlformats.org/officeDocument/2006/relationships" xmlns:p="http://schemas.openxmlformats.org/presentationml/2006/main">
   <p:cSld>
@@ -3321,6 +4606,937 @@
               <a:t>How to secure</a:t>
             </a:r>
             <a:endParaRPr lang="en-US"/>
+          </a:p>
+        </p:txBody>
+      </p:sp>
+    </p:spTree>
+  </p:cSld>
+  <p:clrMapOvr>
+    <a:masterClrMapping/>
+  </p:clrMapOvr>
+</p:sld>
+</file>
+
+<file path=ppt/slides/slide4.xml><?xml version="1.0" encoding="utf-8"?>
+<p:sld xmlns:a="http://schemas.openxmlformats.org/drawingml/2006/main" xmlns:r="http://schemas.openxmlformats.org/officeDocument/2006/relationships" xmlns:p="http://schemas.openxmlformats.org/presentationml/2006/main">
+  <p:cSld>
+    <p:spTree>
+      <p:nvGrpSpPr>
+        <p:cNvPr id="1" name=""/>
+        <p:cNvGrpSpPr/>
+        <p:nvPr/>
+      </p:nvGrpSpPr>
+      <p:grpSpPr>
+        <a:xfrm>
+          <a:off x="0" y="0"/>
+          <a:ext cx="0" cy="0"/>
+          <a:chOff x="0" y="0"/>
+          <a:chExt cx="0" cy="0"/>
+        </a:xfrm>
+      </p:grpSpPr>
+      <p:sp>
+        <p:nvSpPr>
+          <p:cNvPr id="2" name="Title 1"/>
+          <p:cNvSpPr>
+            <a:spLocks noGrp="1"/>
+          </p:cNvSpPr>
+          <p:nvPr>
+            <p:ph type="title"/>
+          </p:nvPr>
+        </p:nvSpPr>
+        <p:spPr/>
+        <p:txBody>
+          <a:bodyPr/>
+          <a:lstStyle/>
+          <a:p>
+            <a:r>
+              <a:rPr lang="en-SG" dirty="0" smtClean="0"/>
+              <a:t>003</a:t>
+            </a:r>
+            <a:endParaRPr lang="en-US" dirty="0"/>
+          </a:p>
+        </p:txBody>
+      </p:sp>
+      <p:sp>
+        <p:nvSpPr>
+          <p:cNvPr id="3" name="Content Placeholder 2"/>
+          <p:cNvSpPr>
+            <a:spLocks noGrp="1"/>
+          </p:cNvSpPr>
+          <p:nvPr>
+            <p:ph idx="1"/>
+          </p:nvPr>
+        </p:nvSpPr>
+        <p:spPr/>
+        <p:txBody>
+          <a:bodyPr>
+            <a:normAutofit lnSpcReduction="10000"/>
+          </a:bodyPr>
+          <a:lstStyle/>
+          <a:p>
+            <a:r>
+              <a:rPr lang="en-SG" dirty="0" smtClean="0"/>
+              <a:t>Hacking: gain unauthorized access to system not supposed to access</a:t>
+            </a:r>
+          </a:p>
+          <a:p>
+            <a:r>
+              <a:rPr lang="en-SG" dirty="0" smtClean="0"/>
+              <a:t>3 types of hacker:</a:t>
+            </a:r>
+          </a:p>
+          <a:p>
+            <a:pPr lvl="1"/>
+            <a:r>
+              <a:rPr lang="en-SG" dirty="0" smtClean="0"/>
+              <a:t>Black hat: bad</a:t>
+            </a:r>
+          </a:p>
+          <a:p>
+            <a:pPr lvl="1"/>
+            <a:r>
+              <a:rPr lang="en-SG" dirty="0" smtClean="0"/>
+              <a:t>White hat: approved to hack</a:t>
+            </a:r>
+          </a:p>
+          <a:p>
+            <a:pPr lvl="1"/>
+            <a:r>
+              <a:rPr lang="en-SG" dirty="0" smtClean="0"/>
+              <a:t>Grey hat: not approved to hack, will not steal $, etc.</a:t>
+            </a:r>
+          </a:p>
+          <a:p>
+            <a:r>
+              <a:rPr lang="en-SG" dirty="0" smtClean="0"/>
+              <a:t>Why:</a:t>
+            </a:r>
+          </a:p>
+          <a:p>
+            <a:pPr lvl="1"/>
+            <a:r>
+              <a:rPr lang="en-SG" dirty="0" smtClean="0"/>
+              <a:t>For job. Secure system from hacker</a:t>
+            </a:r>
+            <a:endParaRPr lang="en-US" dirty="0"/>
+          </a:p>
+        </p:txBody>
+      </p:sp>
+    </p:spTree>
+  </p:cSld>
+  <p:clrMapOvr>
+    <a:masterClrMapping/>
+  </p:clrMapOvr>
+</p:sld>
+</file>
+
+<file path=ppt/slides/slide5.xml><?xml version="1.0" encoding="utf-8"?>
+<p:sld xmlns:a="http://schemas.openxmlformats.org/drawingml/2006/main" xmlns:r="http://schemas.openxmlformats.org/officeDocument/2006/relationships" xmlns:p="http://schemas.openxmlformats.org/presentationml/2006/main">
+  <p:cSld>
+    <p:spTree>
+      <p:nvGrpSpPr>
+        <p:cNvPr id="1" name=""/>
+        <p:cNvGrpSpPr/>
+        <p:nvPr/>
+      </p:nvGrpSpPr>
+      <p:grpSpPr>
+        <a:xfrm>
+          <a:off x="0" y="0"/>
+          <a:ext cx="0" cy="0"/>
+          <a:chOff x="0" y="0"/>
+          <a:chExt cx="0" cy="0"/>
+        </a:xfrm>
+      </p:grpSpPr>
+      <p:sp>
+        <p:nvSpPr>
+          <p:cNvPr id="2" name="Title 1"/>
+          <p:cNvSpPr>
+            <a:spLocks noGrp="1"/>
+          </p:cNvSpPr>
+          <p:nvPr>
+            <p:ph type="title"/>
+          </p:nvPr>
+        </p:nvSpPr>
+        <p:spPr/>
+        <p:txBody>
+          <a:bodyPr/>
+          <a:lstStyle/>
+          <a:p>
+            <a:r>
+              <a:rPr lang="en-SG" dirty="0" smtClean="0"/>
+              <a:t>005</a:t>
+            </a:r>
+            <a:endParaRPr lang="en-US" dirty="0"/>
+          </a:p>
+        </p:txBody>
+      </p:sp>
+      <p:sp>
+        <p:nvSpPr>
+          <p:cNvPr id="3" name="Content Placeholder 2"/>
+          <p:cNvSpPr>
+            <a:spLocks noGrp="1"/>
+          </p:cNvSpPr>
+          <p:nvPr>
+            <p:ph idx="1"/>
+          </p:nvPr>
+        </p:nvSpPr>
+        <p:spPr/>
+        <p:txBody>
+          <a:bodyPr/>
+          <a:lstStyle/>
+          <a:p>
+            <a:r>
+              <a:rPr lang="en-SG" dirty="0" smtClean="0"/>
+              <a:t>Lab setup (everything (VM) inside 1PC)</a:t>
+            </a:r>
+          </a:p>
+          <a:p>
+            <a:pPr lvl="1"/>
+            <a:r>
+              <a:rPr lang="en-SG" dirty="0" smtClean="0"/>
+              <a:t>Hacking machine (Kali Linux)</a:t>
+            </a:r>
+          </a:p>
+          <a:p>
+            <a:pPr lvl="1"/>
+            <a:r>
+              <a:rPr lang="en-SG" dirty="0" smtClean="0"/>
+              <a:t>Target machine/ website/ </a:t>
+            </a:r>
+            <a:r>
+              <a:rPr lang="en-SG" dirty="0" err="1" smtClean="0"/>
+              <a:t>netwk</a:t>
+            </a:r>
+            <a:endParaRPr lang="en-SG" dirty="0" smtClean="0"/>
+          </a:p>
+          <a:p>
+            <a:pPr lvl="2"/>
+            <a:r>
+              <a:rPr lang="en-SG" dirty="0" smtClean="0"/>
+              <a:t>Windows</a:t>
+            </a:r>
+          </a:p>
+          <a:p>
+            <a:pPr lvl="2"/>
+            <a:r>
+              <a:rPr lang="en-SG" dirty="0" err="1" smtClean="0"/>
+              <a:t>Metasploitable</a:t>
+            </a:r>
+            <a:endParaRPr lang="en-SG" dirty="0" smtClean="0"/>
+          </a:p>
+          <a:p>
+            <a:r>
+              <a:rPr lang="en-SG" dirty="0" smtClean="0"/>
+              <a:t>VM: </a:t>
+            </a:r>
+            <a:r>
+              <a:rPr lang="en-SG" dirty="0" err="1" smtClean="0"/>
+              <a:t>Virtualbox</a:t>
+            </a:r>
+            <a:r>
+              <a:rPr lang="en-SG" dirty="0" smtClean="0"/>
+              <a:t> or </a:t>
+            </a:r>
+            <a:r>
+              <a:rPr lang="en-SG" dirty="0" err="1" smtClean="0"/>
+              <a:t>VMWare</a:t>
+            </a:r>
+            <a:endParaRPr lang="en-SG" dirty="0" smtClean="0"/>
+          </a:p>
+          <a:p>
+            <a:pPr lvl="1"/>
+            <a:r>
+              <a:rPr lang="en-SG" dirty="0" smtClean="0"/>
+              <a:t>Wont lose any functionality</a:t>
+            </a:r>
+          </a:p>
+          <a:p>
+            <a:pPr lvl="1"/>
+            <a:r>
+              <a:rPr lang="en-SG" dirty="0" smtClean="0"/>
+              <a:t>Wont affect host PC</a:t>
+            </a:r>
+            <a:endParaRPr lang="en-US" dirty="0"/>
+          </a:p>
+        </p:txBody>
+      </p:sp>
+    </p:spTree>
+  </p:cSld>
+  <p:clrMapOvr>
+    <a:masterClrMapping/>
+  </p:clrMapOvr>
+</p:sld>
+</file>
+
+<file path=ppt/slides/slide6.xml><?xml version="1.0" encoding="utf-8"?>
+<p:sld xmlns:a="http://schemas.openxmlformats.org/drawingml/2006/main" xmlns:r="http://schemas.openxmlformats.org/officeDocument/2006/relationships" xmlns:p="http://schemas.openxmlformats.org/presentationml/2006/main">
+  <p:cSld>
+    <p:spTree>
+      <p:nvGrpSpPr>
+        <p:cNvPr id="1" name=""/>
+        <p:cNvGrpSpPr/>
+        <p:nvPr/>
+      </p:nvGrpSpPr>
+      <p:grpSpPr>
+        <a:xfrm>
+          <a:off x="0" y="0"/>
+          <a:ext cx="0" cy="0"/>
+          <a:chOff x="0" y="0"/>
+          <a:chExt cx="0" cy="0"/>
+        </a:xfrm>
+      </p:grpSpPr>
+      <p:sp>
+        <p:nvSpPr>
+          <p:cNvPr id="2" name="Title 1"/>
+          <p:cNvSpPr>
+            <a:spLocks noGrp="1"/>
+          </p:cNvSpPr>
+          <p:nvPr>
+            <p:ph type="title"/>
+          </p:nvPr>
+        </p:nvSpPr>
+        <p:spPr/>
+        <p:txBody>
+          <a:bodyPr/>
+          <a:lstStyle/>
+          <a:p>
+            <a:r>
+              <a:rPr lang="en-SG" dirty="0" smtClean="0"/>
+              <a:t>006</a:t>
+            </a:r>
+            <a:endParaRPr lang="en-US" dirty="0"/>
+          </a:p>
+        </p:txBody>
+      </p:sp>
+      <p:sp>
+        <p:nvSpPr>
+          <p:cNvPr id="3" name="Content Placeholder 2"/>
+          <p:cNvSpPr>
+            <a:spLocks noGrp="1"/>
+          </p:cNvSpPr>
+          <p:nvPr>
+            <p:ph idx="1"/>
+          </p:nvPr>
+        </p:nvSpPr>
+        <p:spPr/>
+        <p:txBody>
+          <a:bodyPr>
+            <a:normAutofit fontScale="92500"/>
+          </a:bodyPr>
+          <a:lstStyle/>
+          <a:p>
+            <a:r>
+              <a:rPr lang="en-SG" dirty="0" smtClean="0"/>
+              <a:t>Kali has many hacking tools</a:t>
+            </a:r>
+          </a:p>
+          <a:p>
+            <a:r>
+              <a:rPr lang="en-SG" dirty="0" smtClean="0"/>
+              <a:t>Custom kali for this course:</a:t>
+            </a:r>
+          </a:p>
+          <a:p>
+            <a:pPr lvl="1"/>
+            <a:r>
+              <a:rPr lang="en-SG" dirty="0" smtClean="0"/>
+              <a:t>Smoother and faster</a:t>
+            </a:r>
+          </a:p>
+          <a:p>
+            <a:pPr lvl="1"/>
+            <a:r>
+              <a:rPr lang="en-SG" dirty="0" smtClean="0"/>
+              <a:t>Extra program not in original Kali</a:t>
+            </a:r>
+          </a:p>
+          <a:p>
+            <a:r>
+              <a:rPr lang="en-SG" dirty="0" smtClean="0"/>
+              <a:t>Enable virtualization to run virtual machine.</a:t>
+            </a:r>
+          </a:p>
+          <a:p>
+            <a:r>
+              <a:rPr lang="en-SG" dirty="0" smtClean="0"/>
+              <a:t>Check:</a:t>
+            </a:r>
+          </a:p>
+          <a:p>
+            <a:pPr lvl="1"/>
+            <a:r>
+              <a:rPr lang="en-SG" dirty="0" smtClean="0"/>
+              <a:t>Task Manager&gt; Performance &gt; Virtualization: Enabled.</a:t>
+            </a:r>
+          </a:p>
+          <a:p>
+            <a:pPr lvl="1"/>
+            <a:r>
+              <a:rPr lang="en-SG" dirty="0" smtClean="0"/>
+              <a:t>If not enable, restart PC, press F key &gt; Intel Virtual Technology: Enabled (or other wording)</a:t>
+            </a:r>
+            <a:endParaRPr lang="en-US" dirty="0"/>
+          </a:p>
+        </p:txBody>
+      </p:sp>
+    </p:spTree>
+  </p:cSld>
+  <p:clrMapOvr>
+    <a:masterClrMapping/>
+  </p:clrMapOvr>
+</p:sld>
+</file>
+
+<file path=ppt/slides/slide7.xml><?xml version="1.0" encoding="utf-8"?>
+<p:sld xmlns:a="http://schemas.openxmlformats.org/drawingml/2006/main" xmlns:r="http://schemas.openxmlformats.org/officeDocument/2006/relationships" xmlns:p="http://schemas.openxmlformats.org/presentationml/2006/main">
+  <p:cSld>
+    <p:spTree>
+      <p:nvGrpSpPr>
+        <p:cNvPr id="1" name=""/>
+        <p:cNvGrpSpPr/>
+        <p:nvPr/>
+      </p:nvGrpSpPr>
+      <p:grpSpPr>
+        <a:xfrm>
+          <a:off x="0" y="0"/>
+          <a:ext cx="0" cy="0"/>
+          <a:chOff x="0" y="0"/>
+          <a:chExt cx="0" cy="0"/>
+        </a:xfrm>
+      </p:grpSpPr>
+      <p:sp>
+        <p:nvSpPr>
+          <p:cNvPr id="2" name="Title 1"/>
+          <p:cNvSpPr>
+            <a:spLocks noGrp="1"/>
+          </p:cNvSpPr>
+          <p:nvPr>
+            <p:ph type="title"/>
+          </p:nvPr>
+        </p:nvSpPr>
+        <p:spPr/>
+        <p:txBody>
+          <a:bodyPr/>
+          <a:lstStyle/>
+          <a:p>
+            <a:r>
+              <a:rPr lang="en-SG" dirty="0" smtClean="0"/>
+              <a:t>007</a:t>
+            </a:r>
+            <a:endParaRPr lang="en-US" dirty="0"/>
+          </a:p>
+        </p:txBody>
+      </p:sp>
+      <p:sp>
+        <p:nvSpPr>
+          <p:cNvPr id="3" name="Content Placeholder 2"/>
+          <p:cNvSpPr>
+            <a:spLocks noGrp="1"/>
+          </p:cNvSpPr>
+          <p:nvPr>
+            <p:ph idx="1"/>
+          </p:nvPr>
+        </p:nvSpPr>
+        <p:spPr/>
+        <p:txBody>
+          <a:bodyPr>
+            <a:normAutofit fontScale="70000" lnSpcReduction="20000"/>
+          </a:bodyPr>
+          <a:lstStyle/>
+          <a:p>
+            <a:r>
+              <a:rPr lang="en-SG" dirty="0" smtClean="0"/>
+              <a:t>Download </a:t>
+            </a:r>
+            <a:r>
+              <a:rPr lang="en-SG" dirty="0" err="1" smtClean="0"/>
+              <a:t>Vmware</a:t>
+            </a:r>
+            <a:r>
+              <a:rPr lang="en-SG" dirty="0" smtClean="0"/>
+              <a:t> program </a:t>
+            </a:r>
+            <a:r>
+              <a:rPr lang="en-SG" dirty="0" smtClean="0">
+                <a:hlinkClick r:id="rId2"/>
+              </a:rPr>
+              <a:t>https://zsecurity.org/download-custom-kali/</a:t>
+            </a:r>
+            <a:endParaRPr lang="en-SG" dirty="0" smtClean="0"/>
+          </a:p>
+          <a:p>
+            <a:r>
+              <a:rPr lang="en-SG" dirty="0" smtClean="0"/>
+              <a:t>Follow default setting. Next all the way.</a:t>
+            </a:r>
+          </a:p>
+          <a:p>
+            <a:r>
+              <a:rPr lang="en-SG" dirty="0" err="1" smtClean="0"/>
+              <a:t>Vmware</a:t>
+            </a:r>
+            <a:r>
+              <a:rPr lang="en-SG" dirty="0" smtClean="0"/>
+              <a:t>&gt;File&gt;Open&gt;…</a:t>
+            </a:r>
+          </a:p>
+          <a:p>
+            <a:r>
+              <a:rPr lang="en-SG" dirty="0" smtClean="0"/>
+              <a:t>Edit VM settings</a:t>
+            </a:r>
+          </a:p>
+          <a:p>
+            <a:pPr lvl="1"/>
+            <a:r>
+              <a:rPr lang="en-SG" dirty="0" smtClean="0"/>
+              <a:t>Memory: 2GB</a:t>
+            </a:r>
+          </a:p>
+          <a:p>
+            <a:pPr lvl="1"/>
+            <a:r>
+              <a:rPr lang="en-SG" dirty="0" smtClean="0"/>
+              <a:t>Processor: 2</a:t>
+            </a:r>
+          </a:p>
+          <a:p>
+            <a:pPr lvl="1"/>
+            <a:r>
+              <a:rPr lang="en-SG" dirty="0" smtClean="0"/>
+              <a:t>Network: NAT (Host is the router to the VM)</a:t>
+            </a:r>
+          </a:p>
+          <a:p>
+            <a:pPr lvl="1"/>
+            <a:r>
+              <a:rPr lang="en-SG" dirty="0" smtClean="0"/>
+              <a:t>Display: tick Accelerate 3D graphics</a:t>
+            </a:r>
+          </a:p>
+          <a:p>
+            <a:r>
+              <a:rPr lang="en-SG" dirty="0" smtClean="0"/>
+              <a:t>Login: root, </a:t>
+            </a:r>
+            <a:r>
+              <a:rPr lang="en-SG" dirty="0" err="1" smtClean="0"/>
+              <a:t>toor</a:t>
+            </a:r>
+            <a:endParaRPr lang="en-SG" dirty="0" smtClean="0"/>
+          </a:p>
+          <a:p>
+            <a:r>
+              <a:rPr lang="en-SG" dirty="0" smtClean="0"/>
+              <a:t>View &gt; Full screen</a:t>
+            </a:r>
+          </a:p>
+          <a:p>
+            <a:r>
+              <a:rPr lang="en-SG" dirty="0" smtClean="0"/>
+              <a:t>If icon looks small (due to high monitor resolution), Display Setting &gt; Scale: 200%</a:t>
+            </a:r>
+            <a:endParaRPr lang="en-US" dirty="0"/>
+          </a:p>
+        </p:txBody>
+      </p:sp>
+    </p:spTree>
+  </p:cSld>
+  <p:clrMapOvr>
+    <a:masterClrMapping/>
+  </p:clrMapOvr>
+</p:sld>
+</file>
+
+<file path=ppt/slides/slide8.xml><?xml version="1.0" encoding="utf-8"?>
+<p:sld xmlns:a="http://schemas.openxmlformats.org/drawingml/2006/main" xmlns:r="http://schemas.openxmlformats.org/officeDocument/2006/relationships" xmlns:p="http://schemas.openxmlformats.org/presentationml/2006/main">
+  <p:cSld>
+    <p:spTree>
+      <p:nvGrpSpPr>
+        <p:cNvPr id="1" name=""/>
+        <p:cNvGrpSpPr/>
+        <p:nvPr/>
+      </p:nvGrpSpPr>
+      <p:grpSpPr>
+        <a:xfrm>
+          <a:off x="0" y="0"/>
+          <a:ext cx="0" cy="0"/>
+          <a:chOff x="0" y="0"/>
+          <a:chExt cx="0" cy="0"/>
+        </a:xfrm>
+      </p:grpSpPr>
+      <p:sp>
+        <p:nvSpPr>
+          <p:cNvPr id="2" name="Title 1"/>
+          <p:cNvSpPr>
+            <a:spLocks noGrp="1"/>
+          </p:cNvSpPr>
+          <p:nvPr>
+            <p:ph type="title"/>
+          </p:nvPr>
+        </p:nvSpPr>
+        <p:spPr/>
+        <p:txBody>
+          <a:bodyPr/>
+          <a:lstStyle/>
+          <a:p>
+            <a:r>
+              <a:rPr lang="en-SG" dirty="0" smtClean="0"/>
+              <a:t>010 Kali Linux basic</a:t>
+            </a:r>
+            <a:endParaRPr lang="en-US" dirty="0"/>
+          </a:p>
+        </p:txBody>
+      </p:sp>
+      <p:sp>
+        <p:nvSpPr>
+          <p:cNvPr id="3" name="Content Placeholder 2"/>
+          <p:cNvSpPr>
+            <a:spLocks noGrp="1"/>
+          </p:cNvSpPr>
+          <p:nvPr>
+            <p:ph idx="1"/>
+          </p:nvPr>
+        </p:nvSpPr>
+        <p:spPr/>
+        <p:txBody>
+          <a:bodyPr>
+            <a:normAutofit fontScale="55000" lnSpcReduction="20000"/>
+          </a:bodyPr>
+          <a:lstStyle/>
+          <a:p>
+            <a:r>
+              <a:rPr lang="en-SG" dirty="0" smtClean="0"/>
+              <a:t>Many hacking applications</a:t>
+            </a:r>
+          </a:p>
+          <a:p>
+            <a:r>
+              <a:rPr lang="en-SG" dirty="0" smtClean="0"/>
+              <a:t>Home directory</a:t>
+            </a:r>
+          </a:p>
+          <a:p>
+            <a:r>
+              <a:rPr lang="en-SG" dirty="0" smtClean="0"/>
+              <a:t>Many workspace</a:t>
+            </a:r>
+            <a:r>
+              <a:rPr lang="en-US" dirty="0" smtClean="0"/>
+              <a:t>s</a:t>
+            </a:r>
+          </a:p>
+          <a:p>
+            <a:r>
+              <a:rPr lang="en-SG" dirty="0" smtClean="0"/>
+              <a:t>Dock</a:t>
+            </a:r>
+          </a:p>
+          <a:p>
+            <a:r>
+              <a:rPr lang="en-SG" dirty="0" smtClean="0"/>
+              <a:t>Wireless adapter: USB for providing WIFI functionality (</a:t>
+            </a:r>
+            <a:r>
+              <a:rPr lang="en-SG" dirty="0" err="1" smtClean="0"/>
+              <a:t>comm</a:t>
+            </a:r>
+            <a:r>
+              <a:rPr lang="en-SG" dirty="0" smtClean="0"/>
+              <a:t> with other PC)</a:t>
+            </a:r>
+          </a:p>
+          <a:p>
+            <a:r>
+              <a:rPr lang="en-SG" dirty="0" smtClean="0"/>
+              <a:t>Built-in </a:t>
+            </a:r>
+            <a:r>
+              <a:rPr lang="en-SG" dirty="0" err="1" smtClean="0"/>
+              <a:t>wifi</a:t>
+            </a:r>
+            <a:r>
+              <a:rPr lang="en-SG" dirty="0" smtClean="0"/>
+              <a:t> adapter:</a:t>
+            </a:r>
+          </a:p>
+          <a:p>
+            <a:pPr lvl="1"/>
+            <a:r>
+              <a:rPr lang="en-SG" dirty="0" smtClean="0"/>
+              <a:t>Cannot use in VM</a:t>
+            </a:r>
+          </a:p>
+          <a:p>
+            <a:pPr lvl="1"/>
+            <a:r>
+              <a:rPr lang="en-SG" dirty="0" smtClean="0"/>
+              <a:t>Not good for hacking</a:t>
+            </a:r>
+          </a:p>
+          <a:p>
+            <a:pPr lvl="1"/>
+            <a:r>
+              <a:rPr lang="en-SG" dirty="0" smtClean="0"/>
+              <a:t>Brand is not </a:t>
+            </a:r>
+            <a:r>
+              <a:rPr lang="en-SG" dirty="0" err="1" smtClean="0"/>
+              <a:t>impt</a:t>
+            </a:r>
+            <a:r>
+              <a:rPr lang="en-SG" dirty="0" smtClean="0"/>
+              <a:t>, chipset is </a:t>
+            </a:r>
+            <a:r>
+              <a:rPr lang="en-SG" dirty="0" err="1" smtClean="0"/>
+              <a:t>impt</a:t>
+            </a:r>
+            <a:endParaRPr lang="en-SG" dirty="0" smtClean="0"/>
+          </a:p>
+          <a:p>
+            <a:r>
+              <a:rPr lang="en-SG" dirty="0" smtClean="0"/>
+              <a:t>Wireless chipset (processor, brain)</a:t>
+            </a:r>
+          </a:p>
+          <a:p>
+            <a:pPr lvl="1"/>
+            <a:r>
+              <a:rPr lang="en-SG" dirty="0" smtClean="0"/>
+              <a:t>Best: </a:t>
+            </a:r>
+            <a:r>
+              <a:rPr lang="en-SG" dirty="0" err="1" smtClean="0"/>
+              <a:t>Atheros</a:t>
+            </a:r>
+            <a:r>
+              <a:rPr lang="en-SG" dirty="0" smtClean="0"/>
+              <a:t> AR9271 (chipset): Monitor mode &amp; packet injection mode, </a:t>
+            </a:r>
+            <a:r>
+              <a:rPr lang="en-SG" dirty="0" err="1" smtClean="0"/>
+              <a:t>aircrack</a:t>
+            </a:r>
+            <a:r>
+              <a:rPr lang="en-SG" dirty="0" smtClean="0"/>
+              <a:t> NG suite. But does not provide 5GHz </a:t>
+            </a:r>
+            <a:r>
+              <a:rPr lang="en-SG" dirty="0" err="1" smtClean="0"/>
+              <a:t>wifi</a:t>
+            </a:r>
+            <a:endParaRPr lang="en-SG" dirty="0" smtClean="0"/>
+          </a:p>
+          <a:p>
+            <a:pPr lvl="2"/>
+            <a:r>
+              <a:rPr lang="en-SG" smtClean="0"/>
+              <a:t>Alfa AWUS036NHA (brand model) </a:t>
+            </a:r>
+            <a:r>
+              <a:rPr lang="en-SG" dirty="0" smtClean="0"/>
+              <a:t>(better, longer range. Bad: quite big, visible)</a:t>
+            </a:r>
+          </a:p>
+          <a:p>
+            <a:pPr lvl="1"/>
+            <a:r>
+              <a:rPr lang="en-SG" dirty="0" err="1" smtClean="0"/>
+              <a:t>Realtek</a:t>
+            </a:r>
+            <a:r>
+              <a:rPr lang="en-SG" dirty="0" smtClean="0"/>
+              <a:t>  RTL8812AU (chipset) or AR8812AU?: everything the </a:t>
+            </a:r>
+            <a:r>
+              <a:rPr lang="en-SG" dirty="0" err="1" smtClean="0"/>
+              <a:t>Atheros</a:t>
+            </a:r>
+            <a:r>
+              <a:rPr lang="en-SG" dirty="0" smtClean="0"/>
+              <a:t> AR9271 + 5GHz. Bad: only support recently</a:t>
+            </a:r>
+          </a:p>
+          <a:p>
+            <a:pPr lvl="2"/>
+            <a:r>
+              <a:rPr lang="en-SG" dirty="0" smtClean="0"/>
+              <a:t>Alfa AWUS036ACH (brand model)</a:t>
+            </a:r>
+          </a:p>
+          <a:p>
+            <a:pPr lvl="1"/>
+            <a:r>
+              <a:rPr lang="en-SG" dirty="0" smtClean="0"/>
+              <a:t>Additional functionality: AP mode (add as Access Point)</a:t>
+            </a:r>
+          </a:p>
+        </p:txBody>
+      </p:sp>
+    </p:spTree>
+  </p:cSld>
+  <p:clrMapOvr>
+    <a:masterClrMapping/>
+  </p:clrMapOvr>
+</p:sld>
+</file>
+
+<file path=ppt/slides/slide9.xml><?xml version="1.0" encoding="utf-8"?>
+<p:sld xmlns:a="http://schemas.openxmlformats.org/drawingml/2006/main" xmlns:r="http://schemas.openxmlformats.org/officeDocument/2006/relationships" xmlns:p="http://schemas.openxmlformats.org/presentationml/2006/main">
+  <p:cSld>
+    <p:spTree>
+      <p:nvGrpSpPr>
+        <p:cNvPr id="1" name=""/>
+        <p:cNvGrpSpPr/>
+        <p:nvPr/>
+      </p:nvGrpSpPr>
+      <p:grpSpPr>
+        <a:xfrm>
+          <a:off x="0" y="0"/>
+          <a:ext cx="0" cy="0"/>
+          <a:chOff x="0" y="0"/>
+          <a:chExt cx="0" cy="0"/>
+        </a:xfrm>
+      </p:grpSpPr>
+      <p:sp>
+        <p:nvSpPr>
+          <p:cNvPr id="2" name="Title 1"/>
+          <p:cNvSpPr>
+            <a:spLocks noGrp="1"/>
+          </p:cNvSpPr>
+          <p:nvPr>
+            <p:ph type="title"/>
+          </p:nvPr>
+        </p:nvSpPr>
+        <p:spPr/>
+        <p:txBody>
+          <a:bodyPr/>
+          <a:lstStyle/>
+          <a:p>
+            <a:r>
+              <a:rPr lang="en-SG" dirty="0" smtClean="0"/>
+              <a:t>011 Linux terminal</a:t>
+            </a:r>
+            <a:endParaRPr lang="en-US" dirty="0"/>
+          </a:p>
+        </p:txBody>
+      </p:sp>
+      <p:sp>
+        <p:nvSpPr>
+          <p:cNvPr id="3" name="Content Placeholder 2"/>
+          <p:cNvSpPr>
+            <a:spLocks noGrp="1"/>
+          </p:cNvSpPr>
+          <p:nvPr>
+            <p:ph idx="1"/>
+          </p:nvPr>
+        </p:nvSpPr>
+        <p:spPr/>
+        <p:txBody>
+          <a:bodyPr>
+            <a:normAutofit fontScale="70000" lnSpcReduction="20000"/>
+          </a:bodyPr>
+          <a:lstStyle/>
+          <a:p>
+            <a:r>
+              <a:rPr lang="en-SG" dirty="0" smtClean="0"/>
+              <a:t>Can do everything. B4 GUI, is terminal</a:t>
+            </a:r>
+          </a:p>
+          <a:p>
+            <a:r>
+              <a:rPr lang="en-SG" dirty="0" smtClean="0"/>
+              <a:t>In many situation, u have </a:t>
+            </a:r>
+            <a:r>
+              <a:rPr lang="en-SG" dirty="0" err="1" smtClean="0"/>
+              <a:t>ssh</a:t>
+            </a:r>
+            <a:r>
+              <a:rPr lang="en-SG" dirty="0" smtClean="0"/>
+              <a:t> or terminal only.</a:t>
+            </a:r>
+          </a:p>
+          <a:p>
+            <a:r>
+              <a:rPr lang="en-SG" dirty="0" err="1" smtClean="0"/>
+              <a:t>Pwd</a:t>
+            </a:r>
+            <a:endParaRPr lang="en-SG" dirty="0" smtClean="0"/>
+          </a:p>
+          <a:p>
+            <a:r>
+              <a:rPr lang="en-SG" dirty="0" smtClean="0"/>
+              <a:t>Ls</a:t>
+            </a:r>
+          </a:p>
+          <a:p>
+            <a:r>
+              <a:rPr lang="en-SG" dirty="0" err="1" smtClean="0"/>
+              <a:t>Cd</a:t>
+            </a:r>
+            <a:endParaRPr lang="en-SG" dirty="0" smtClean="0"/>
+          </a:p>
+          <a:p>
+            <a:r>
+              <a:rPr lang="en-SG" dirty="0" smtClean="0"/>
+              <a:t>Man &lt;</a:t>
+            </a:r>
+            <a:r>
+              <a:rPr lang="en-SG" dirty="0" err="1" smtClean="0"/>
+              <a:t>cmd</a:t>
+            </a:r>
+            <a:r>
+              <a:rPr lang="en-SG" dirty="0" smtClean="0"/>
+              <a:t>&gt;, q to exit: full manual page</a:t>
+            </a:r>
+          </a:p>
+          <a:p>
+            <a:r>
+              <a:rPr lang="en-SG" dirty="0" smtClean="0"/>
+              <a:t>Clear</a:t>
+            </a:r>
+          </a:p>
+          <a:p>
+            <a:r>
+              <a:rPr lang="en-SG" dirty="0" smtClean="0"/>
+              <a:t>-- help (word), -h (letter): short built-in </a:t>
+            </a:r>
+            <a:r>
+              <a:rPr lang="en-SG" dirty="0" err="1" smtClean="0"/>
+              <a:t>cmd</a:t>
+            </a:r>
+            <a:r>
+              <a:rPr lang="en-SG" dirty="0" smtClean="0"/>
+              <a:t> usage summary</a:t>
+            </a:r>
+          </a:p>
+          <a:p>
+            <a:r>
+              <a:rPr lang="en-SG" dirty="0" smtClean="0"/>
+              <a:t>Command has options and arguments</a:t>
+            </a:r>
+          </a:p>
+          <a:p>
+            <a:r>
+              <a:rPr lang="en-SG" dirty="0" smtClean="0"/>
+              <a:t>Tab auto-complete</a:t>
+            </a:r>
+          </a:p>
+          <a:p>
+            <a:r>
+              <a:rPr lang="en-SG" dirty="0" smtClean="0"/>
+              <a:t>2 good websites</a:t>
+            </a:r>
+          </a:p>
+          <a:p>
+            <a:pPr lvl="1"/>
+            <a:r>
+              <a:rPr lang="en-SG" dirty="0" smtClean="0"/>
+              <a:t>Explainshell.com</a:t>
+            </a:r>
+            <a:endParaRPr lang="en-US" dirty="0"/>
           </a:p>
         </p:txBody>
       </p:sp>

--- a/Ethical hacking.pptx
+++ b/Ethical hacking.pptx
@@ -20,6 +20,16 @@
     <p:sldId id="268" r:id="rId14"/>
     <p:sldId id="269" r:id="rId15"/>
     <p:sldId id="270" r:id="rId16"/>
+    <p:sldId id="271" r:id="rId17"/>
+    <p:sldId id="272" r:id="rId18"/>
+    <p:sldId id="273" r:id="rId19"/>
+    <p:sldId id="274" r:id="rId20"/>
+    <p:sldId id="276" r:id="rId21"/>
+    <p:sldId id="275" r:id="rId22"/>
+    <p:sldId id="277" r:id="rId23"/>
+    <p:sldId id="278" r:id="rId24"/>
+    <p:sldId id="279" r:id="rId25"/>
+    <p:sldId id="280" r:id="rId26"/>
   </p:sldIdLst>
   <p:sldSz cx="9144000" cy="6858000" type="screen4x3"/>
   <p:notesSz cx="6858000" cy="9144000"/>
@@ -303,7 +313,7 @@
             <a:fld id="{AD8F8F55-8874-4454-8B9A-A4E7233EC04D}" type="datetimeFigureOut">
               <a:rPr lang="en-US" smtClean="0"/>
               <a:pPr/>
-              <a:t>6/4/2026</a:t>
+              <a:t>6/5/2026</a:t>
             </a:fld>
             <a:endParaRPr lang="en-US"/>
           </a:p>
@@ -470,7 +480,7 @@
             <a:fld id="{AD8F8F55-8874-4454-8B9A-A4E7233EC04D}" type="datetimeFigureOut">
               <a:rPr lang="en-US" smtClean="0"/>
               <a:pPr/>
-              <a:t>6/4/2026</a:t>
+              <a:t>6/5/2026</a:t>
             </a:fld>
             <a:endParaRPr lang="en-US"/>
           </a:p>
@@ -647,7 +657,7 @@
             <a:fld id="{AD8F8F55-8874-4454-8B9A-A4E7233EC04D}" type="datetimeFigureOut">
               <a:rPr lang="en-US" smtClean="0"/>
               <a:pPr/>
-              <a:t>6/4/2026</a:t>
+              <a:t>6/5/2026</a:t>
             </a:fld>
             <a:endParaRPr lang="en-US"/>
           </a:p>
@@ -814,7 +824,7 @@
             <a:fld id="{AD8F8F55-8874-4454-8B9A-A4E7233EC04D}" type="datetimeFigureOut">
               <a:rPr lang="en-US" smtClean="0"/>
               <a:pPr/>
-              <a:t>6/4/2026</a:t>
+              <a:t>6/5/2026</a:t>
             </a:fld>
             <a:endParaRPr lang="en-US"/>
           </a:p>
@@ -1057,7 +1067,7 @@
             <a:fld id="{AD8F8F55-8874-4454-8B9A-A4E7233EC04D}" type="datetimeFigureOut">
               <a:rPr lang="en-US" smtClean="0"/>
               <a:pPr/>
-              <a:t>6/4/2026</a:t>
+              <a:t>6/5/2026</a:t>
             </a:fld>
             <a:endParaRPr lang="en-US"/>
           </a:p>
@@ -1342,7 +1352,7 @@
             <a:fld id="{AD8F8F55-8874-4454-8B9A-A4E7233EC04D}" type="datetimeFigureOut">
               <a:rPr lang="en-US" smtClean="0"/>
               <a:pPr/>
-              <a:t>6/4/2026</a:t>
+              <a:t>6/5/2026</a:t>
             </a:fld>
             <a:endParaRPr lang="en-US"/>
           </a:p>
@@ -1761,7 +1771,7 @@
             <a:fld id="{AD8F8F55-8874-4454-8B9A-A4E7233EC04D}" type="datetimeFigureOut">
               <a:rPr lang="en-US" smtClean="0"/>
               <a:pPr/>
-              <a:t>6/4/2026</a:t>
+              <a:t>6/5/2026</a:t>
             </a:fld>
             <a:endParaRPr lang="en-US"/>
           </a:p>
@@ -1876,7 +1886,7 @@
             <a:fld id="{AD8F8F55-8874-4454-8B9A-A4E7233EC04D}" type="datetimeFigureOut">
               <a:rPr lang="en-US" smtClean="0"/>
               <a:pPr/>
-              <a:t>6/4/2026</a:t>
+              <a:t>6/5/2026</a:t>
             </a:fld>
             <a:endParaRPr lang="en-US"/>
           </a:p>
@@ -1968,7 +1978,7 @@
             <a:fld id="{AD8F8F55-8874-4454-8B9A-A4E7233EC04D}" type="datetimeFigureOut">
               <a:rPr lang="en-US" smtClean="0"/>
               <a:pPr/>
-              <a:t>6/4/2026</a:t>
+              <a:t>6/5/2026</a:t>
             </a:fld>
             <a:endParaRPr lang="en-US"/>
           </a:p>
@@ -2242,7 +2252,7 @@
             <a:fld id="{AD8F8F55-8874-4454-8B9A-A4E7233EC04D}" type="datetimeFigureOut">
               <a:rPr lang="en-US" smtClean="0"/>
               <a:pPr/>
-              <a:t>6/4/2026</a:t>
+              <a:t>6/5/2026</a:t>
             </a:fld>
             <a:endParaRPr lang="en-US"/>
           </a:p>
@@ -2492,7 +2502,7 @@
             <a:fld id="{AD8F8F55-8874-4454-8B9A-A4E7233EC04D}" type="datetimeFigureOut">
               <a:rPr lang="en-US" smtClean="0"/>
               <a:pPr/>
-              <a:t>6/4/2026</a:t>
+              <a:t>6/5/2026</a:t>
             </a:fld>
             <a:endParaRPr lang="en-US"/>
           </a:p>
@@ -2702,7 +2712,7 @@
             <a:fld id="{AD8F8F55-8874-4454-8B9A-A4E7233EC04D}" type="datetimeFigureOut">
               <a:rPr lang="en-US" smtClean="0"/>
               <a:pPr/>
-              <a:t>6/4/2026</a:t>
+              <a:t>6/5/2026</a:t>
             </a:fld>
             <a:endParaRPr lang="en-US"/>
           </a:p>
@@ -3428,13 +3438,8 @@
             </a:r>
             <a:r>
               <a:rPr lang="en-SG" dirty="0" smtClean="0"/>
-              <a:t> VM if it is not added yet</a:t>
-            </a:r>
-            <a:r>
-              <a:rPr lang="en-SG" dirty="0" smtClean="0"/>
-              <a:t>. Select USB 3.1. USB2 cannot work.</a:t>
-            </a:r>
-            <a:endParaRPr lang="en-SG" dirty="0" smtClean="0"/>
+              <a:t> VM if it is not added yet. Select USB 3.1. USB2 cannot work.</a:t>
+            </a:r>
           </a:p>
           <a:p>
             <a:r>
@@ -3463,11 +3468,7 @@
             </a:r>
             <a:r>
               <a:rPr lang="en-SG" dirty="0" smtClean="0"/>
-              <a:t> adapter</a:t>
-            </a:r>
-            <a:r>
-              <a:rPr lang="en-SG" dirty="0" smtClean="0"/>
-              <a:t>.</a:t>
+              <a:t> adapter.</a:t>
             </a:r>
           </a:p>
           <a:p>
@@ -3856,11 +3857,7 @@
             </a:r>
             <a:r>
               <a:rPr lang="en-US" dirty="0" smtClean="0"/>
-              <a:t>&gt;: change. May fail if NIC does not allow MAC spoofing or VM with MAC locked by hypervisor</a:t>
-            </a:r>
-            <a:r>
-              <a:rPr lang="en-US" dirty="0" smtClean="0"/>
-              <a:t>.</a:t>
+              <a:t>&gt;: change. May fail if NIC does not allow MAC spoofing or VM with MAC locked by hypervisor.</a:t>
             </a:r>
           </a:p>
           <a:p>
@@ -3957,11 +3954,7 @@
           <a:p>
             <a:r>
               <a:rPr lang="en-US" dirty="0" smtClean="0"/>
-              <a:t>If change back without restarting PC, it is the network </a:t>
-            </a:r>
-            <a:r>
-              <a:rPr lang="en-US" dirty="0" smtClean="0"/>
-              <a:t>manager&gt; To prevent that, do the following:</a:t>
+              <a:t>If change back without restarting PC, it is the network manager&gt; To prevent that, do the following:</a:t>
             </a:r>
           </a:p>
           <a:p>
@@ -3970,19 +3963,7 @@
               <a:rPr lang="en-US" smtClean="0">
                 <a:hlinkClick r:id="rId2"/>
               </a:rPr>
-              <a:t>https</a:t>
-            </a:r>
-            <a:r>
-              <a:rPr lang="en-US" smtClean="0">
-                <a:hlinkClick r:id="rId2"/>
-              </a:rPr>
-              <a:t>://</a:t>
-            </a:r>
-            <a:r>
-              <a:rPr lang="en-US" smtClean="0">
-                <a:hlinkClick r:id="rId2"/>
-              </a:rPr>
-              <a:t>www.youtube.com/watch?v=7AUGQNBCddo</a:t>
+              <a:t>https://www.youtube.com/watch?v=7AUGQNBCddo</a:t>
             </a:r>
             <a:endParaRPr lang="en-US" smtClean="0"/>
           </a:p>
@@ -3994,15 +3975,7 @@
             </a:r>
             <a:r>
               <a:rPr lang="en-US" dirty="0" smtClean="0"/>
-              <a:t> </a:t>
-            </a:r>
-            <a:r>
-              <a:rPr lang="en-US" dirty="0" smtClean="0"/>
-              <a:t>/</a:t>
-            </a:r>
-            <a:r>
-              <a:rPr lang="en-US" dirty="0" smtClean="0"/>
-              <a:t>etc/</a:t>
+              <a:t> /etc/</a:t>
             </a:r>
             <a:r>
               <a:rPr lang="en-US" dirty="0" err="1" smtClean="0"/>
@@ -4291,7 +4264,7 @@
         <p:spPr/>
         <p:txBody>
           <a:bodyPr>
-            <a:normAutofit fontScale="77500" lnSpcReduction="20000"/>
+            <a:normAutofit fontScale="55000" lnSpcReduction="20000"/>
           </a:bodyPr>
           <a:lstStyle/>
           <a:p>
@@ -4319,7 +4292,7 @@
           <a:p>
             <a:r>
               <a:rPr lang="en-US" dirty="0" err="1" smtClean="0"/>
-              <a:t>Iwconfig</a:t>
+              <a:t>iwconfig</a:t>
             </a:r>
             <a:r>
               <a:rPr lang="en-US" dirty="0" smtClean="0"/>
@@ -4342,6 +4315,64 @@
             </a:r>
           </a:p>
           <a:p>
+            <a:pPr lvl="1"/>
+            <a:r>
+              <a:rPr lang="en-SG" dirty="0" smtClean="0"/>
+              <a:t>The </a:t>
+            </a:r>
+            <a:r>
+              <a:rPr lang="en-SG" dirty="0" err="1" smtClean="0"/>
+              <a:t>wifi</a:t>
+            </a:r>
+            <a:r>
+              <a:rPr lang="en-SG" dirty="0" smtClean="0"/>
+              <a:t> adapter I buy is 3 </a:t>
+            </a:r>
+            <a:r>
+              <a:rPr lang="en-SG" dirty="0" err="1" smtClean="0"/>
+              <a:t>dBm</a:t>
+            </a:r>
+            <a:r>
+              <a:rPr lang="en-SG" dirty="0" smtClean="0"/>
+              <a:t> </a:t>
+            </a:r>
+            <a:r>
+              <a:rPr lang="en-SG" dirty="0" err="1" smtClean="0"/>
+              <a:t>Tx</a:t>
+            </a:r>
+            <a:r>
+              <a:rPr lang="en-SG" dirty="0" smtClean="0"/>
+              <a:t>-Power (2mW) </a:t>
+            </a:r>
+            <a:r>
+              <a:rPr lang="en-SG" dirty="0" err="1" smtClean="0"/>
+              <a:t>vs</a:t>
+            </a:r>
+            <a:r>
+              <a:rPr lang="en-SG" dirty="0" smtClean="0"/>
+              <a:t> video (20 </a:t>
+            </a:r>
+            <a:r>
+              <a:rPr lang="en-SG" dirty="0" err="1" smtClean="0"/>
+              <a:t>dBm</a:t>
+            </a:r>
+            <a:r>
+              <a:rPr lang="en-SG" dirty="0" smtClean="0"/>
+              <a:t>=100mW</a:t>
+            </a:r>
+            <a:r>
+              <a:rPr lang="en-SG" dirty="0" smtClean="0"/>
+              <a:t>)</a:t>
+            </a:r>
+          </a:p>
+          <a:p>
+            <a:r>
+              <a:rPr lang="en-SG" dirty="0" smtClean="0"/>
+              <a:t>Monitor mode cannot use to surf internet</a:t>
+            </a:r>
+            <a:endParaRPr lang="en-US" dirty="0" smtClean="0"/>
+          </a:p>
+          <a:p>
             <a:r>
               <a:rPr lang="en-US" dirty="0" smtClean="0"/>
               <a:t>But for wireless network, u can access all packet as they are in the air. Set to monitor mode. Not all wireless adapter support monitor mode.</a:t>
@@ -4351,14 +4382,26 @@
             <a:pPr lvl="1"/>
             <a:r>
               <a:rPr lang="en-US" dirty="0" smtClean="0"/>
-              <a:t>Down wireless interface</a:t>
-            </a:r>
-          </a:p>
-          <a:p>
-            <a:pPr lvl="1"/>
+              <a:t>Down wireless interface: </a:t>
+            </a:r>
             <a:r>
               <a:rPr lang="en-US" dirty="0" err="1" smtClean="0"/>
-              <a:t>Airmon-ng</a:t>
+              <a:t>ifconfig</a:t>
+            </a:r>
+            <a:r>
+              <a:rPr lang="en-US" dirty="0" smtClean="0"/>
+              <a:t> wlan0 down</a:t>
+            </a:r>
+          </a:p>
+          <a:p>
+            <a:pPr lvl="1"/>
+            <a:r>
+              <a:rPr lang="en-US" dirty="0" err="1" smtClean="0">
+                <a:solidFill>
+                  <a:srgbClr val="FF0000"/>
+                </a:solidFill>
+              </a:rPr>
+              <a:t>airmon-ng</a:t>
             </a:r>
             <a:r>
               <a:rPr lang="en-US" dirty="0" smtClean="0"/>
@@ -4369,7 +4412,7 @@
             <a:pPr lvl="1"/>
             <a:r>
               <a:rPr lang="en-US" dirty="0" err="1" smtClean="0"/>
-              <a:t>Iwconfig</a:t>
+              <a:t>iwconfig</a:t>
             </a:r>
             <a:r>
               <a:rPr lang="en-US" dirty="0" smtClean="0"/>
@@ -4380,10 +4423,860 @@
             <a:pPr lvl="1"/>
             <a:r>
               <a:rPr lang="en-US" dirty="0" smtClean="0"/>
-              <a:t>Up wireless interface</a:t>
-            </a:r>
-          </a:p>
-          <a:p>
+              <a:t>Up wireless interface: </a:t>
+            </a:r>
+            <a:r>
+              <a:rPr lang="en-US" dirty="0" err="1" smtClean="0"/>
+              <a:t>ifconfig</a:t>
+            </a:r>
+            <a:r>
+              <a:rPr lang="en-US" dirty="0" smtClean="0"/>
+              <a:t> wlan0 </a:t>
+            </a:r>
+            <a:r>
+              <a:rPr lang="en-US" dirty="0" smtClean="0"/>
+              <a:t>up</a:t>
+            </a:r>
+          </a:p>
+          <a:p>
+            <a:r>
+              <a:rPr lang="en-SG" dirty="0" smtClean="0"/>
+              <a:t>Alternative method: </a:t>
+            </a:r>
+          </a:p>
+          <a:p>
+            <a:pPr lvl="1"/>
+            <a:r>
+              <a:rPr lang="en-US" dirty="0" smtClean="0">
+                <a:hlinkClick r:id="rId2"/>
+              </a:rPr>
+              <a:t>https://</a:t>
+            </a:r>
+            <a:r>
+              <a:rPr lang="en-US" dirty="0" smtClean="0">
+                <a:hlinkClick r:id="rId2"/>
+              </a:rPr>
+              <a:t>www.youtube.com/watch?v=wiIoR_0epvs</a:t>
+            </a:r>
+            <a:endParaRPr lang="en-US" dirty="0" smtClean="0"/>
+          </a:p>
+          <a:p>
+            <a:pPr lvl="1"/>
+            <a:r>
+              <a:rPr lang="en-US" dirty="0" smtClean="0"/>
+              <a:t>Down </a:t>
+            </a:r>
+            <a:r>
+              <a:rPr lang="en-US" dirty="0" smtClean="0"/>
+              <a:t>wireless interface: </a:t>
+            </a:r>
+            <a:r>
+              <a:rPr lang="en-US" dirty="0" err="1" smtClean="0"/>
+              <a:t>ifconfig</a:t>
+            </a:r>
+            <a:r>
+              <a:rPr lang="en-US" dirty="0" smtClean="0"/>
+              <a:t> wlan0 down</a:t>
+            </a:r>
+          </a:p>
+          <a:p>
+            <a:pPr lvl="1"/>
+            <a:r>
+              <a:rPr lang="en-US" dirty="0" err="1" smtClean="0"/>
+              <a:t>airmon-ng</a:t>
+            </a:r>
+            <a:r>
+              <a:rPr lang="en-US" dirty="0" smtClean="0"/>
+              <a:t> check kill: kill network manager. Don’t rely on it for internet.</a:t>
+            </a:r>
+          </a:p>
+          <a:p>
+            <a:pPr lvl="1"/>
+            <a:r>
+              <a:rPr lang="en-SG" dirty="0" err="1" smtClean="0"/>
+              <a:t>airmon-ng</a:t>
+            </a:r>
+            <a:r>
+              <a:rPr lang="en-SG" dirty="0" smtClean="0"/>
+              <a:t> start wlan0: start monitor mode. The wlan0 will change to wlan0mon</a:t>
+            </a:r>
+          </a:p>
+          <a:p>
+            <a:pPr lvl="1"/>
+            <a:r>
+              <a:rPr lang="en-US" dirty="0" smtClean="0"/>
+              <a:t>Up wireless interface: </a:t>
+            </a:r>
+            <a:r>
+              <a:rPr lang="en-US" dirty="0" err="1" smtClean="0"/>
+              <a:t>ifconfig</a:t>
+            </a:r>
+            <a:r>
+              <a:rPr lang="en-US" dirty="0" smtClean="0"/>
+              <a:t> </a:t>
+            </a:r>
+            <a:r>
+              <a:rPr lang="en-US" dirty="0" smtClean="0"/>
+              <a:t>wlan0mon up</a:t>
+            </a:r>
+            <a:endParaRPr lang="en-US" dirty="0" smtClean="0"/>
+          </a:p>
+          <a:p>
+            <a:endParaRPr lang="en-US" dirty="0"/>
+          </a:p>
+        </p:txBody>
+      </p:sp>
+    </p:spTree>
+  </p:cSld>
+  <p:clrMapOvr>
+    <a:masterClrMapping/>
+  </p:clrMapOvr>
+</p:sld>
+</file>
+
+<file path=ppt/slides/slide16.xml><?xml version="1.0" encoding="utf-8"?>
+<p:sld xmlns:a="http://schemas.openxmlformats.org/drawingml/2006/main" xmlns:r="http://schemas.openxmlformats.org/officeDocument/2006/relationships" xmlns:p="http://schemas.openxmlformats.org/presentationml/2006/main">
+  <p:cSld>
+    <p:spTree>
+      <p:nvGrpSpPr>
+        <p:cNvPr id="1" name=""/>
+        <p:cNvGrpSpPr/>
+        <p:nvPr/>
+      </p:nvGrpSpPr>
+      <p:grpSpPr>
+        <a:xfrm>
+          <a:off x="0" y="0"/>
+          <a:ext cx="0" cy="0"/>
+          <a:chOff x="0" y="0"/>
+          <a:chExt cx="0" cy="0"/>
+        </a:xfrm>
+      </p:grpSpPr>
+      <p:sp>
+        <p:nvSpPr>
+          <p:cNvPr id="2" name="Title 1"/>
+          <p:cNvSpPr>
+            <a:spLocks noGrp="1"/>
+          </p:cNvSpPr>
+          <p:nvPr>
+            <p:ph type="title"/>
+          </p:nvPr>
+        </p:nvSpPr>
+        <p:spPr/>
+        <p:txBody>
+          <a:bodyPr>
+            <a:normAutofit fontScale="90000"/>
+          </a:bodyPr>
+          <a:lstStyle/>
+          <a:p>
+            <a:r>
+              <a:rPr lang="en-SG" dirty="0" smtClean="0"/>
+              <a:t>Pre-Connection attack</a:t>
+            </a:r>
+            <a:br>
+              <a:rPr lang="en-SG" dirty="0" smtClean="0"/>
+            </a:br>
+            <a:r>
+              <a:rPr lang="en-SG" dirty="0" smtClean="0"/>
+              <a:t>17 packet sniffing</a:t>
+            </a:r>
+            <a:endParaRPr lang="en-US" dirty="0"/>
+          </a:p>
+        </p:txBody>
+      </p:sp>
+      <p:sp>
+        <p:nvSpPr>
+          <p:cNvPr id="3" name="Content Placeholder 2"/>
+          <p:cNvSpPr>
+            <a:spLocks noGrp="1"/>
+          </p:cNvSpPr>
+          <p:nvPr>
+            <p:ph idx="1"/>
+          </p:nvPr>
+        </p:nvSpPr>
+        <p:spPr/>
+        <p:txBody>
+          <a:bodyPr>
+            <a:normAutofit fontScale="55000" lnSpcReduction="20000"/>
+          </a:bodyPr>
+          <a:lstStyle/>
+          <a:p>
+            <a:r>
+              <a:rPr lang="en-SG" dirty="0" smtClean="0"/>
+              <a:t>Enable monitor mode</a:t>
+            </a:r>
+          </a:p>
+          <a:p>
+            <a:r>
+              <a:rPr lang="en-SG" dirty="0" err="1" smtClean="0">
+                <a:solidFill>
+                  <a:srgbClr val="FF0000"/>
+                </a:solidFill>
+              </a:rPr>
+              <a:t>airodump-ng</a:t>
+            </a:r>
+            <a:r>
+              <a:rPr lang="en-SG" dirty="0" smtClean="0">
+                <a:solidFill>
+                  <a:srgbClr val="FF0000"/>
+                </a:solidFill>
+              </a:rPr>
+              <a:t> wlan0</a:t>
+            </a:r>
+            <a:r>
+              <a:rPr lang="en-SG" dirty="0" smtClean="0"/>
+              <a:t>: discover all the wireless network around and display useful information. Only 2.4GHz.</a:t>
+            </a:r>
+          </a:p>
+          <a:p>
+            <a:r>
+              <a:rPr lang="en-SG" dirty="0" err="1" smtClean="0"/>
+              <a:t>airodump-ng</a:t>
+            </a:r>
+            <a:r>
+              <a:rPr lang="en-SG" dirty="0" smtClean="0"/>
+              <a:t> --band a wlan0: 5GHz</a:t>
+            </a:r>
+            <a:endParaRPr lang="en-SG" dirty="0" smtClean="0"/>
+          </a:p>
+          <a:p>
+            <a:r>
+              <a:rPr lang="en-SG" dirty="0" err="1" smtClean="0"/>
+              <a:t>airodump-ng</a:t>
+            </a:r>
+            <a:r>
+              <a:rPr lang="en-SG" dirty="0" smtClean="0"/>
+              <a:t> --band </a:t>
+            </a:r>
+            <a:r>
+              <a:rPr lang="en-SG" dirty="0" err="1" smtClean="0"/>
+              <a:t>abg</a:t>
+            </a:r>
+            <a:r>
+              <a:rPr lang="en-SG" dirty="0" smtClean="0"/>
+              <a:t> </a:t>
+            </a:r>
+            <a:r>
+              <a:rPr lang="en-SG" dirty="0" smtClean="0"/>
+              <a:t>wlan0: </a:t>
+            </a:r>
+            <a:r>
+              <a:rPr lang="en-SG" dirty="0" smtClean="0"/>
+              <a:t>2.4GHz + 5GHz. Slightly slower.</a:t>
+            </a:r>
+            <a:endParaRPr lang="en-SG" dirty="0" smtClean="0"/>
+          </a:p>
+          <a:p>
+            <a:endParaRPr lang="en-SG" dirty="0" smtClean="0"/>
+          </a:p>
+          <a:p>
+            <a:pPr lvl="1"/>
+            <a:r>
+              <a:rPr lang="en-SG" dirty="0" smtClean="0"/>
+              <a:t>ESSID: wireless network name, some has &lt;length: 0&gt;</a:t>
+            </a:r>
+          </a:p>
+          <a:p>
+            <a:pPr lvl="1"/>
+            <a:r>
+              <a:rPr lang="en-SG" dirty="0" smtClean="0"/>
+              <a:t>BSSID: </a:t>
+            </a:r>
+            <a:r>
+              <a:rPr lang="en-SG" dirty="0" err="1" smtClean="0"/>
+              <a:t>mac</a:t>
+            </a:r>
+            <a:r>
+              <a:rPr lang="en-SG" dirty="0" smtClean="0"/>
+              <a:t> address of the wireless network</a:t>
+            </a:r>
+          </a:p>
+          <a:p>
+            <a:pPr lvl="1"/>
+            <a:r>
+              <a:rPr lang="en-SG" dirty="0" smtClean="0"/>
+              <a:t>PWR: signal strength of the power (less negative=more powerful). Can use to estimate how far from it.</a:t>
+            </a:r>
+          </a:p>
+          <a:p>
+            <a:pPr lvl="1"/>
+            <a:r>
+              <a:rPr lang="en-SG" dirty="0" smtClean="0"/>
+              <a:t>Beacons: may change for some</a:t>
+            </a:r>
+          </a:p>
+          <a:p>
+            <a:pPr lvl="1"/>
+            <a:r>
+              <a:rPr lang="en-SG" dirty="0" smtClean="0"/>
+              <a:t>#Data: useful packet (with different IV)</a:t>
+            </a:r>
+          </a:p>
+          <a:p>
+            <a:pPr lvl="1"/>
+            <a:r>
+              <a:rPr lang="en-SG" dirty="0" smtClean="0"/>
+              <a:t>#/s: # packets for the last 10 sec</a:t>
+            </a:r>
+          </a:p>
+          <a:p>
+            <a:pPr lvl="1"/>
+            <a:r>
+              <a:rPr lang="en-SG" dirty="0" smtClean="0"/>
+              <a:t>CH: channel that the network works for</a:t>
+            </a:r>
+          </a:p>
+          <a:p>
+            <a:pPr lvl="1"/>
+            <a:r>
+              <a:rPr lang="en-SG" dirty="0" smtClean="0"/>
+              <a:t>MB: max speed of the network</a:t>
+            </a:r>
+          </a:p>
+          <a:p>
+            <a:pPr lvl="1"/>
+            <a:r>
+              <a:rPr lang="en-SG" dirty="0" smtClean="0"/>
+              <a:t>ENC: encryption used by the network. WPA, WPA2, WPA3, WEP, OPN: Open network</a:t>
+            </a:r>
+          </a:p>
+          <a:p>
+            <a:pPr lvl="1"/>
+            <a:r>
+              <a:rPr lang="en-SG" dirty="0" smtClean="0"/>
+              <a:t>CIPHER: CCMP, WEP,</a:t>
+            </a:r>
+          </a:p>
+          <a:p>
+            <a:pPr lvl="1"/>
+            <a:r>
+              <a:rPr lang="en-SG" dirty="0" smtClean="0"/>
+              <a:t>AUTH: authentication used by network. PSK, MGT, SAE</a:t>
+            </a:r>
+          </a:p>
+          <a:p>
+            <a:pPr lvl="1"/>
+            <a:endParaRPr lang="en-US" dirty="0"/>
+          </a:p>
+        </p:txBody>
+      </p:sp>
+    </p:spTree>
+  </p:cSld>
+  <p:clrMapOvr>
+    <a:masterClrMapping/>
+  </p:clrMapOvr>
+</p:sld>
+</file>
+
+<file path=ppt/slides/slide17.xml><?xml version="1.0" encoding="utf-8"?>
+<p:sld xmlns:a="http://schemas.openxmlformats.org/drawingml/2006/main" xmlns:r="http://schemas.openxmlformats.org/officeDocument/2006/relationships" xmlns:p="http://schemas.openxmlformats.org/presentationml/2006/main">
+  <p:cSld>
+    <p:spTree>
+      <p:nvGrpSpPr>
+        <p:cNvPr id="1" name=""/>
+        <p:cNvGrpSpPr/>
+        <p:nvPr/>
+      </p:nvGrpSpPr>
+      <p:grpSpPr>
+        <a:xfrm>
+          <a:off x="0" y="0"/>
+          <a:ext cx="0" cy="0"/>
+          <a:chOff x="0" y="0"/>
+          <a:chExt cx="0" cy="0"/>
+        </a:xfrm>
+      </p:grpSpPr>
+      <p:sp>
+        <p:nvSpPr>
+          <p:cNvPr id="2" name="Title 1"/>
+          <p:cNvSpPr>
+            <a:spLocks noGrp="1"/>
+          </p:cNvSpPr>
+          <p:nvPr>
+            <p:ph type="title"/>
+          </p:nvPr>
+        </p:nvSpPr>
+        <p:spPr/>
+        <p:txBody>
+          <a:bodyPr>
+            <a:normAutofit fontScale="90000"/>
+          </a:bodyPr>
+          <a:lstStyle/>
+          <a:p>
+            <a:r>
+              <a:rPr lang="en-SG" dirty="0" smtClean="0"/>
+              <a:t>Pre-Connection attack</a:t>
+            </a:r>
+            <a:br>
+              <a:rPr lang="en-SG" dirty="0" smtClean="0"/>
+            </a:br>
+            <a:r>
+              <a:rPr lang="en-SG" dirty="0" smtClean="0"/>
+              <a:t>18 </a:t>
+            </a:r>
+            <a:r>
+              <a:rPr lang="en-SG" dirty="0" err="1" smtClean="0"/>
+              <a:t>wifi</a:t>
+            </a:r>
+            <a:r>
+              <a:rPr lang="en-SG" dirty="0" smtClean="0"/>
+              <a:t> bands</a:t>
+            </a:r>
+            <a:endParaRPr lang="en-US" dirty="0"/>
+          </a:p>
+        </p:txBody>
+      </p:sp>
+      <p:sp>
+        <p:nvSpPr>
+          <p:cNvPr id="3" name="Content Placeholder 2"/>
+          <p:cNvSpPr>
+            <a:spLocks noGrp="1"/>
+          </p:cNvSpPr>
+          <p:nvPr>
+            <p:ph idx="1"/>
+          </p:nvPr>
+        </p:nvSpPr>
+        <p:spPr/>
+        <p:txBody>
+          <a:bodyPr/>
+          <a:lstStyle/>
+          <a:p>
+            <a:r>
+              <a:rPr lang="en-SG" dirty="0" smtClean="0"/>
+              <a:t>Bands define frequency range (2.4 and 5GHz)</a:t>
+            </a:r>
+          </a:p>
+          <a:p>
+            <a:r>
+              <a:rPr lang="en-SG" dirty="0" smtClean="0"/>
+              <a:t>Not many </a:t>
+            </a:r>
+            <a:r>
+              <a:rPr lang="en-SG" dirty="0" err="1" smtClean="0"/>
+              <a:t>wifi</a:t>
+            </a:r>
+            <a:r>
+              <a:rPr lang="en-SG" dirty="0" smtClean="0"/>
+              <a:t> adapter can see 5GHz and can monitor mode + packet injection mode.</a:t>
+            </a:r>
+          </a:p>
+          <a:p>
+            <a:endParaRPr lang="en-US" dirty="0"/>
+          </a:p>
+        </p:txBody>
+      </p:sp>
+    </p:spTree>
+  </p:cSld>
+  <p:clrMapOvr>
+    <a:masterClrMapping/>
+  </p:clrMapOvr>
+</p:sld>
+</file>
+
+<file path=ppt/slides/slide18.xml><?xml version="1.0" encoding="utf-8"?>
+<p:sld xmlns:a="http://schemas.openxmlformats.org/drawingml/2006/main" xmlns:r="http://schemas.openxmlformats.org/officeDocument/2006/relationships" xmlns:p="http://schemas.openxmlformats.org/presentationml/2006/main">
+  <p:cSld>
+    <p:spTree>
+      <p:nvGrpSpPr>
+        <p:cNvPr id="1" name=""/>
+        <p:cNvGrpSpPr/>
+        <p:nvPr/>
+      </p:nvGrpSpPr>
+      <p:grpSpPr>
+        <a:xfrm>
+          <a:off x="0" y="0"/>
+          <a:ext cx="0" cy="0"/>
+          <a:chOff x="0" y="0"/>
+          <a:chExt cx="0" cy="0"/>
+        </a:xfrm>
+      </p:grpSpPr>
+      <p:sp>
+        <p:nvSpPr>
+          <p:cNvPr id="2" name="Title 1"/>
+          <p:cNvSpPr>
+            <a:spLocks noGrp="1"/>
+          </p:cNvSpPr>
+          <p:nvPr>
+            <p:ph type="title"/>
+          </p:nvPr>
+        </p:nvSpPr>
+        <p:spPr/>
+        <p:txBody>
+          <a:bodyPr>
+            <a:normAutofit fontScale="90000"/>
+          </a:bodyPr>
+          <a:lstStyle/>
+          <a:p>
+            <a:r>
+              <a:rPr lang="en-SG" dirty="0" smtClean="0"/>
+              <a:t>Pre-Connection attack</a:t>
+            </a:r>
+            <a:br>
+              <a:rPr lang="en-SG" dirty="0" smtClean="0"/>
+            </a:br>
+            <a:r>
+              <a:rPr lang="en-SG" dirty="0" smtClean="0"/>
+              <a:t>19 targeted packet sniffing</a:t>
+            </a:r>
+            <a:endParaRPr lang="en-US" dirty="0"/>
+          </a:p>
+        </p:txBody>
+      </p:sp>
+      <p:sp>
+        <p:nvSpPr>
+          <p:cNvPr id="3" name="Content Placeholder 2"/>
+          <p:cNvSpPr>
+            <a:spLocks noGrp="1"/>
+          </p:cNvSpPr>
+          <p:nvPr>
+            <p:ph idx="1"/>
+          </p:nvPr>
+        </p:nvSpPr>
+        <p:spPr/>
+        <p:txBody>
+          <a:bodyPr>
+            <a:normAutofit fontScale="70000" lnSpcReduction="20000"/>
+          </a:bodyPr>
+          <a:lstStyle/>
+          <a:p>
+            <a:r>
+              <a:rPr lang="en-US" dirty="0" err="1" smtClean="0">
+                <a:solidFill>
+                  <a:srgbClr val="FF0000"/>
+                </a:solidFill>
+              </a:rPr>
+              <a:t>airodump-ng</a:t>
+            </a:r>
+            <a:r>
+              <a:rPr lang="en-US" dirty="0" smtClean="0"/>
+              <a:t> </a:t>
+            </a:r>
+            <a:r>
+              <a:rPr lang="en-US" dirty="0" smtClean="0"/>
+              <a:t>--</a:t>
+            </a:r>
+            <a:r>
+              <a:rPr lang="en-US" dirty="0" err="1" smtClean="0"/>
+              <a:t>bssid</a:t>
+            </a:r>
+            <a:r>
+              <a:rPr lang="en-US" dirty="0" smtClean="0"/>
+              <a:t> 10:62:EB:3C:EC:B9 --channel 4 --write test </a:t>
+            </a:r>
+            <a:r>
+              <a:rPr lang="en-US" dirty="0" smtClean="0"/>
+              <a:t>wlan0: sniff specific network using BSSID, channel and write to file called test.</a:t>
+            </a:r>
+          </a:p>
+          <a:p>
+            <a:r>
+              <a:rPr lang="en-SG" dirty="0" smtClean="0"/>
+              <a:t>Top section is same as previous, except now there is only 1 network</a:t>
+            </a:r>
+          </a:p>
+          <a:p>
+            <a:r>
+              <a:rPr lang="en-SG" dirty="0" smtClean="0"/>
+              <a:t>Bottom section is the device connected to the network.</a:t>
+            </a:r>
+          </a:p>
+          <a:p>
+            <a:pPr lvl="1"/>
+            <a:r>
+              <a:rPr lang="en-SG" dirty="0" smtClean="0"/>
+              <a:t>STATION: </a:t>
+            </a:r>
+            <a:r>
+              <a:rPr lang="en-SG" dirty="0" err="1" smtClean="0"/>
+              <a:t>mac</a:t>
+            </a:r>
+            <a:r>
+              <a:rPr lang="en-SG" dirty="0" smtClean="0"/>
+              <a:t> address of device</a:t>
+            </a:r>
+          </a:p>
+          <a:p>
+            <a:pPr lvl="1"/>
+            <a:r>
+              <a:rPr lang="en-SG" dirty="0" smtClean="0"/>
+              <a:t>PWR: power of device</a:t>
+            </a:r>
+          </a:p>
+          <a:p>
+            <a:pPr lvl="1"/>
+            <a:r>
+              <a:rPr lang="en-SG" dirty="0" smtClean="0"/>
+              <a:t>Probe: device looking for </a:t>
+            </a:r>
+            <a:r>
+              <a:rPr lang="en-SG" dirty="0" err="1" smtClean="0"/>
+              <a:t>wat</a:t>
+            </a:r>
+            <a:r>
+              <a:rPr lang="en-SG" dirty="0" smtClean="0"/>
+              <a:t> network</a:t>
+            </a:r>
+          </a:p>
+          <a:p>
+            <a:r>
+              <a:rPr lang="en-SG" dirty="0" smtClean="0"/>
+              <a:t>Generate 4 files</a:t>
+            </a:r>
+          </a:p>
+          <a:p>
+            <a:pPr lvl="1"/>
+            <a:r>
+              <a:rPr lang="en-SG" dirty="0" smtClean="0"/>
+              <a:t>t</a:t>
+            </a:r>
+            <a:r>
+              <a:rPr lang="en-SG" dirty="0" smtClean="0"/>
+              <a:t>est-01.csv</a:t>
+            </a:r>
+          </a:p>
+          <a:p>
+            <a:pPr lvl="1"/>
+            <a:r>
+              <a:rPr lang="en-SG" dirty="0" smtClean="0"/>
+              <a:t>t</a:t>
+            </a:r>
+            <a:r>
+              <a:rPr lang="en-SG" dirty="0" smtClean="0"/>
+              <a:t>est-01.kismet.netxml</a:t>
+            </a:r>
+          </a:p>
+          <a:p>
+            <a:pPr lvl="1"/>
+            <a:r>
+              <a:rPr lang="en-SG" dirty="0" smtClean="0"/>
+              <a:t>test-01.cap (use </a:t>
+            </a:r>
+            <a:r>
+              <a:rPr lang="en-SG" dirty="0" err="1" smtClean="0"/>
+              <a:t>wireshark</a:t>
+            </a:r>
+            <a:r>
+              <a:rPr lang="en-SG" dirty="0" smtClean="0"/>
+              <a:t> to view this one)</a:t>
+            </a:r>
+          </a:p>
+          <a:p>
+            <a:pPr lvl="1"/>
+            <a:r>
+              <a:rPr lang="en-SG" dirty="0" smtClean="0"/>
+              <a:t>t</a:t>
+            </a:r>
+            <a:r>
+              <a:rPr lang="en-SG" dirty="0" smtClean="0"/>
+              <a:t>est-01.kismet.csv</a:t>
+            </a:r>
+            <a:endParaRPr lang="en-US" dirty="0" smtClean="0"/>
+          </a:p>
+          <a:p>
+            <a:endParaRPr lang="en-US" dirty="0"/>
+          </a:p>
+        </p:txBody>
+      </p:sp>
+    </p:spTree>
+  </p:cSld>
+  <p:clrMapOvr>
+    <a:masterClrMapping/>
+  </p:clrMapOvr>
+</p:sld>
+</file>
+
+<file path=ppt/slides/slide19.xml><?xml version="1.0" encoding="utf-8"?>
+<p:sld xmlns:a="http://schemas.openxmlformats.org/drawingml/2006/main" xmlns:r="http://schemas.openxmlformats.org/officeDocument/2006/relationships" xmlns:p="http://schemas.openxmlformats.org/presentationml/2006/main">
+  <p:cSld>
+    <p:spTree>
+      <p:nvGrpSpPr>
+        <p:cNvPr id="1" name=""/>
+        <p:cNvGrpSpPr/>
+        <p:nvPr/>
+      </p:nvGrpSpPr>
+      <p:grpSpPr>
+        <a:xfrm>
+          <a:off x="0" y="0"/>
+          <a:ext cx="0" cy="0"/>
+          <a:chOff x="0" y="0"/>
+          <a:chExt cx="0" cy="0"/>
+        </a:xfrm>
+      </p:grpSpPr>
+      <p:sp>
+        <p:nvSpPr>
+          <p:cNvPr id="2" name="Title 1"/>
+          <p:cNvSpPr>
+            <a:spLocks noGrp="1"/>
+          </p:cNvSpPr>
+          <p:nvPr>
+            <p:ph type="title"/>
+          </p:nvPr>
+        </p:nvSpPr>
+        <p:spPr/>
+        <p:txBody>
+          <a:bodyPr>
+            <a:normAutofit/>
+          </a:bodyPr>
+          <a:lstStyle/>
+          <a:p>
+            <a:r>
+              <a:rPr lang="en-SG" sz="2400" dirty="0" smtClean="0"/>
+              <a:t>Pre-Connection attack</a:t>
+            </a:r>
+            <a:br>
+              <a:rPr lang="en-SG" sz="2400" dirty="0" smtClean="0"/>
+            </a:br>
+            <a:r>
+              <a:rPr lang="en-SG" sz="2400" dirty="0" smtClean="0"/>
+              <a:t>20 </a:t>
+            </a:r>
+            <a:r>
+              <a:rPr lang="en-SG" sz="2400" dirty="0" err="1" smtClean="0"/>
+              <a:t>Deauthentication</a:t>
+            </a:r>
+            <a:r>
+              <a:rPr lang="en-SG" sz="2400" dirty="0" smtClean="0"/>
+              <a:t> attack (</a:t>
+            </a:r>
+            <a:r>
+              <a:rPr lang="en-SG" sz="2400" dirty="0" err="1" smtClean="0"/>
+              <a:t>deconnect</a:t>
+            </a:r>
+            <a:r>
+              <a:rPr lang="en-SG" sz="2400" dirty="0" smtClean="0"/>
+              <a:t> device from network)</a:t>
+            </a:r>
+            <a:endParaRPr lang="en-US" sz="2400" dirty="0"/>
+          </a:p>
+        </p:txBody>
+      </p:sp>
+      <p:sp>
+        <p:nvSpPr>
+          <p:cNvPr id="3" name="Content Placeholder 2"/>
+          <p:cNvSpPr>
+            <a:spLocks noGrp="1"/>
+          </p:cNvSpPr>
+          <p:nvPr>
+            <p:ph idx="1"/>
+          </p:nvPr>
+        </p:nvSpPr>
+        <p:spPr/>
+        <p:txBody>
+          <a:bodyPr>
+            <a:normAutofit fontScale="85000" lnSpcReduction="10000"/>
+          </a:bodyPr>
+          <a:lstStyle/>
+          <a:p>
+            <a:r>
+              <a:rPr lang="en-SG" dirty="0" smtClean="0"/>
+              <a:t>Ur PC impersonate </a:t>
+            </a:r>
+            <a:r>
+              <a:rPr lang="en-SG" dirty="0" smtClean="0"/>
+              <a:t> target </a:t>
+            </a:r>
+            <a:r>
+              <a:rPr lang="en-SG" dirty="0" smtClean="0"/>
+              <a:t>device and tells router that it wants to be disconnected</a:t>
+            </a:r>
+          </a:p>
+          <a:p>
+            <a:r>
+              <a:rPr lang="en-SG" dirty="0" smtClean="0"/>
+              <a:t>Ur PC impersonate router and tells target device that it is disconnecting target device.</a:t>
+            </a:r>
+          </a:p>
+          <a:p>
+            <a:r>
+              <a:rPr lang="en-SG" dirty="0" err="1" smtClean="0">
+                <a:solidFill>
+                  <a:srgbClr val="FF0000"/>
+                </a:solidFill>
+              </a:rPr>
+              <a:t>aireplay-ng</a:t>
+            </a:r>
+            <a:r>
+              <a:rPr lang="en-SG" dirty="0" smtClean="0"/>
+              <a:t> --</a:t>
+            </a:r>
+            <a:r>
+              <a:rPr lang="en-SG" dirty="0" err="1" smtClean="0"/>
+              <a:t>deauth</a:t>
+            </a:r>
+            <a:r>
+              <a:rPr lang="en-SG" dirty="0" smtClean="0"/>
+              <a:t> 1000000000 -a &lt;target </a:t>
+            </a:r>
+            <a:r>
+              <a:rPr lang="en-SG" dirty="0" err="1" smtClean="0"/>
+              <a:t>bssid</a:t>
+            </a:r>
+            <a:r>
+              <a:rPr lang="en-SG" dirty="0" smtClean="0"/>
+              <a:t>&gt; -c &lt;device </a:t>
+            </a:r>
+            <a:r>
+              <a:rPr lang="en-SG" dirty="0" err="1" smtClean="0"/>
+              <a:t>mac</a:t>
+            </a:r>
+            <a:r>
+              <a:rPr lang="en-SG" dirty="0" smtClean="0"/>
+              <a:t> </a:t>
+            </a:r>
+            <a:r>
+              <a:rPr lang="en-SG" dirty="0" err="1" smtClean="0"/>
+              <a:t>addr</a:t>
+            </a:r>
+            <a:r>
+              <a:rPr lang="en-SG" dirty="0" smtClean="0"/>
+              <a:t>&gt; -D (for 5GHz) wlan0</a:t>
+            </a:r>
+          </a:p>
+          <a:p>
+            <a:pPr lvl="1"/>
+            <a:r>
+              <a:rPr lang="en-SG" dirty="0" smtClean="0"/>
+              <a:t>Running </a:t>
+            </a:r>
+            <a:r>
+              <a:rPr lang="en-SG" dirty="0" err="1" smtClean="0"/>
+              <a:t>deauth</a:t>
+            </a:r>
+            <a:r>
+              <a:rPr lang="en-SG" dirty="0" smtClean="0"/>
+              <a:t> attack</a:t>
+            </a:r>
+          </a:p>
+          <a:p>
+            <a:pPr lvl="1"/>
+            <a:r>
+              <a:rPr lang="en-SG" dirty="0" smtClean="0"/>
+              <a:t>1000000000 </a:t>
+            </a:r>
+            <a:r>
+              <a:rPr lang="en-SG" dirty="0" smtClean="0"/>
+              <a:t>large number of packet to run </a:t>
+            </a:r>
+            <a:r>
+              <a:rPr lang="en-SG" dirty="0" err="1" smtClean="0"/>
+              <a:t>deauth</a:t>
+            </a:r>
+            <a:r>
+              <a:rPr lang="en-SG" dirty="0" smtClean="0"/>
+              <a:t> attack for very long.</a:t>
+            </a:r>
+          </a:p>
+          <a:p>
+            <a:r>
+              <a:rPr lang="en-SG" dirty="0" smtClean="0"/>
+              <a:t>Pre-connection attack is just to sniff for network and device information + </a:t>
+            </a:r>
+            <a:r>
+              <a:rPr lang="en-SG" dirty="0" err="1" smtClean="0"/>
+              <a:t>deauth</a:t>
+            </a:r>
+            <a:r>
+              <a:rPr lang="en-SG" dirty="0" smtClean="0"/>
+              <a:t> device from network</a:t>
+            </a:r>
             <a:endParaRPr lang="en-US" dirty="0"/>
           </a:p>
         </p:txBody>
@@ -4487,6 +5380,899 @@
               <a:rPr lang="en-US" dirty="0" smtClean="0"/>
               <a:t>Access  webcam</a:t>
             </a:r>
+            <a:endParaRPr lang="en-US" dirty="0"/>
+          </a:p>
+        </p:txBody>
+      </p:sp>
+    </p:spTree>
+  </p:cSld>
+  <p:clrMapOvr>
+    <a:masterClrMapping/>
+  </p:clrMapOvr>
+</p:sld>
+</file>
+
+<file path=ppt/slides/slide20.xml><?xml version="1.0" encoding="utf-8"?>
+<p:sld xmlns:a="http://schemas.openxmlformats.org/drawingml/2006/main" xmlns:r="http://schemas.openxmlformats.org/officeDocument/2006/relationships" xmlns:p="http://schemas.openxmlformats.org/presentationml/2006/main">
+  <p:cSld>
+    <p:spTree>
+      <p:nvGrpSpPr>
+        <p:cNvPr id="1" name=""/>
+        <p:cNvGrpSpPr/>
+        <p:nvPr/>
+      </p:nvGrpSpPr>
+      <p:grpSpPr>
+        <a:xfrm>
+          <a:off x="0" y="0"/>
+          <a:ext cx="0" cy="0"/>
+          <a:chOff x="0" y="0"/>
+          <a:chExt cx="0" cy="0"/>
+        </a:xfrm>
+      </p:grpSpPr>
+      <p:sp>
+        <p:nvSpPr>
+          <p:cNvPr id="2" name="Title 1"/>
+          <p:cNvSpPr>
+            <a:spLocks noGrp="1"/>
+          </p:cNvSpPr>
+          <p:nvPr>
+            <p:ph type="title"/>
+          </p:nvPr>
+        </p:nvSpPr>
+        <p:spPr/>
+        <p:txBody>
+          <a:bodyPr/>
+          <a:lstStyle/>
+          <a:p>
+            <a:endParaRPr lang="en-US"/>
+          </a:p>
+        </p:txBody>
+      </p:sp>
+      <p:sp>
+        <p:nvSpPr>
+          <p:cNvPr id="3" name="Content Placeholder 2"/>
+          <p:cNvSpPr>
+            <a:spLocks noGrp="1"/>
+          </p:cNvSpPr>
+          <p:nvPr>
+            <p:ph idx="1"/>
+          </p:nvPr>
+        </p:nvSpPr>
+        <p:spPr/>
+        <p:txBody>
+          <a:bodyPr/>
+          <a:lstStyle/>
+          <a:p>
+            <a:r>
+              <a:rPr lang="en-US" dirty="0" err="1" smtClean="0"/>
+              <a:t>airmon-ng</a:t>
+            </a:r>
+            <a:r>
+              <a:rPr lang="en-US" dirty="0" smtClean="0"/>
+              <a:t>: change </a:t>
+            </a:r>
+            <a:r>
+              <a:rPr lang="en-US" dirty="0" err="1" smtClean="0"/>
+              <a:t>wifi</a:t>
+            </a:r>
+            <a:r>
+              <a:rPr lang="en-US" dirty="0" smtClean="0"/>
+              <a:t> adapter to monitor mode</a:t>
+            </a:r>
+          </a:p>
+          <a:p>
+            <a:r>
+              <a:rPr lang="en-US" dirty="0" err="1" smtClean="0"/>
+              <a:t>airodump-ng</a:t>
+            </a:r>
+            <a:r>
+              <a:rPr lang="en-US" dirty="0" smtClean="0"/>
+              <a:t>: discover </a:t>
+            </a:r>
+            <a:r>
+              <a:rPr lang="en-US" dirty="0" err="1" smtClean="0"/>
+              <a:t>wifi</a:t>
+            </a:r>
+            <a:r>
+              <a:rPr lang="en-US" dirty="0" smtClean="0"/>
+              <a:t> network, targeted target sniffing, capture packet/ IV</a:t>
+            </a:r>
+          </a:p>
+          <a:p>
+            <a:r>
+              <a:rPr lang="en-SG" dirty="0" err="1" smtClean="0"/>
+              <a:t>aireplay-ng</a:t>
+            </a:r>
+            <a:r>
+              <a:rPr lang="en-SG" dirty="0" smtClean="0"/>
+              <a:t>: </a:t>
+            </a:r>
+            <a:r>
+              <a:rPr lang="en-SG" dirty="0" err="1" smtClean="0"/>
+              <a:t>deauthentication</a:t>
+            </a:r>
+            <a:r>
+              <a:rPr lang="en-SG" dirty="0" smtClean="0"/>
+              <a:t> attack, fake authentication attack, </a:t>
+            </a:r>
+            <a:r>
+              <a:rPr lang="en-SG" dirty="0" err="1" smtClean="0"/>
+              <a:t>arp</a:t>
+            </a:r>
+            <a:r>
+              <a:rPr lang="en-SG" dirty="0" smtClean="0"/>
+              <a:t> replay attack</a:t>
+            </a:r>
+          </a:p>
+          <a:p>
+            <a:r>
+              <a:rPr lang="en-SG" dirty="0" err="1" smtClean="0"/>
+              <a:t>aircrack-ng</a:t>
+            </a:r>
+            <a:r>
+              <a:rPr lang="en-SG" dirty="0" smtClean="0"/>
+              <a:t>: analyse captured IV and crack the key</a:t>
+            </a:r>
+            <a:endParaRPr lang="en-US" dirty="0"/>
+          </a:p>
+        </p:txBody>
+      </p:sp>
+    </p:spTree>
+  </p:cSld>
+  <p:clrMapOvr>
+    <a:masterClrMapping/>
+  </p:clrMapOvr>
+</p:sld>
+</file>
+
+<file path=ppt/slides/slide21.xml><?xml version="1.0" encoding="utf-8"?>
+<p:sld xmlns:a="http://schemas.openxmlformats.org/drawingml/2006/main" xmlns:r="http://schemas.openxmlformats.org/officeDocument/2006/relationships" xmlns:p="http://schemas.openxmlformats.org/presentationml/2006/main">
+  <p:cSld>
+    <p:spTree>
+      <p:nvGrpSpPr>
+        <p:cNvPr id="1" name=""/>
+        <p:cNvGrpSpPr/>
+        <p:nvPr/>
+      </p:nvGrpSpPr>
+      <p:grpSpPr>
+        <a:xfrm>
+          <a:off x="0" y="0"/>
+          <a:ext cx="0" cy="0"/>
+          <a:chOff x="0" y="0"/>
+          <a:chExt cx="0" cy="0"/>
+        </a:xfrm>
+      </p:grpSpPr>
+      <p:sp>
+        <p:nvSpPr>
+          <p:cNvPr id="2" name="Title 1"/>
+          <p:cNvSpPr>
+            <a:spLocks noGrp="1"/>
+          </p:cNvSpPr>
+          <p:nvPr>
+            <p:ph type="title"/>
+          </p:nvPr>
+        </p:nvSpPr>
+        <p:spPr/>
+        <p:txBody>
+          <a:bodyPr>
+            <a:normAutofit fontScale="90000"/>
+          </a:bodyPr>
+          <a:lstStyle/>
+          <a:p>
+            <a:r>
+              <a:rPr lang="en-SG" dirty="0" smtClean="0"/>
+              <a:t>22 Theory behind Cracking WEP Encryption</a:t>
+            </a:r>
+            <a:endParaRPr lang="en-US" dirty="0"/>
+          </a:p>
+        </p:txBody>
+      </p:sp>
+      <p:sp>
+        <p:nvSpPr>
+          <p:cNvPr id="3" name="Content Placeholder 2"/>
+          <p:cNvSpPr>
+            <a:spLocks noGrp="1"/>
+          </p:cNvSpPr>
+          <p:nvPr>
+            <p:ph idx="1"/>
+          </p:nvPr>
+        </p:nvSpPr>
+        <p:spPr/>
+        <p:txBody>
+          <a:bodyPr>
+            <a:normAutofit fontScale="62500" lnSpcReduction="20000"/>
+          </a:bodyPr>
+          <a:lstStyle/>
+          <a:p>
+            <a:r>
+              <a:rPr lang="en-SG" dirty="0" smtClean="0"/>
+              <a:t>WEP: Wired Equivalent Privacy (old encryption (RC4), simple to crack)</a:t>
+            </a:r>
+          </a:p>
+          <a:p>
+            <a:r>
+              <a:rPr lang="en-SG" dirty="0" smtClean="0"/>
+              <a:t>Client and router knows the key. They use it (indirectly) to encrypt and decrypt the message.</a:t>
+            </a:r>
+          </a:p>
+          <a:p>
+            <a:r>
+              <a:rPr lang="en-SG" dirty="0" smtClean="0"/>
+              <a:t>Weakness is how WEP implement </a:t>
+            </a:r>
+            <a:r>
+              <a:rPr lang="en-SG" dirty="0" err="1" smtClean="0"/>
+              <a:t>algo</a:t>
+            </a:r>
+            <a:r>
+              <a:rPr lang="en-SG" dirty="0" smtClean="0"/>
+              <a:t>.</a:t>
+            </a:r>
+          </a:p>
+          <a:p>
+            <a:r>
+              <a:rPr lang="en-SG" dirty="0" smtClean="0"/>
+              <a:t>Random Initialization Vector (24 bits only) is used to generate key stream</a:t>
+            </a:r>
+          </a:p>
+          <a:p>
+            <a:r>
+              <a:rPr lang="en-SG" dirty="0" smtClean="0"/>
+              <a:t>IV + key = </a:t>
+            </a:r>
+            <a:r>
+              <a:rPr lang="en-SG" dirty="0" err="1" smtClean="0"/>
+              <a:t>keystream</a:t>
+            </a:r>
+            <a:endParaRPr lang="en-SG" dirty="0" smtClean="0"/>
+          </a:p>
+          <a:p>
+            <a:r>
+              <a:rPr lang="en-SG" dirty="0" smtClean="0"/>
+              <a:t>Each </a:t>
+            </a:r>
+            <a:r>
+              <a:rPr lang="en-SG" dirty="0" err="1" smtClean="0"/>
+              <a:t>pkt</a:t>
+            </a:r>
+            <a:r>
+              <a:rPr lang="en-SG" dirty="0" smtClean="0"/>
+              <a:t> is encrypted using a unique key stream.</a:t>
+            </a:r>
+          </a:p>
+          <a:p>
+            <a:r>
+              <a:rPr lang="en-SG" dirty="0" smtClean="0"/>
+              <a:t>The encrypted </a:t>
+            </a:r>
+            <a:r>
+              <a:rPr lang="en-SG" dirty="0" err="1" smtClean="0"/>
+              <a:t>pkt</a:t>
+            </a:r>
+            <a:r>
+              <a:rPr lang="en-SG" dirty="0" smtClean="0"/>
+              <a:t> is sent together with IV (pre-pended)</a:t>
+            </a:r>
+          </a:p>
+          <a:p>
+            <a:r>
+              <a:rPr lang="en-SG" dirty="0" smtClean="0"/>
+              <a:t>Weakness:</a:t>
+            </a:r>
+          </a:p>
+          <a:p>
+            <a:pPr lvl="1"/>
+            <a:r>
+              <a:rPr lang="en-SG" dirty="0" smtClean="0"/>
+              <a:t>IV is sent in clear</a:t>
+            </a:r>
+          </a:p>
+          <a:p>
+            <a:pPr lvl="1"/>
+            <a:r>
+              <a:rPr lang="en-SG" dirty="0" smtClean="0"/>
+              <a:t>IV is too small.</a:t>
+            </a:r>
+          </a:p>
+          <a:p>
+            <a:pPr lvl="1"/>
+            <a:r>
+              <a:rPr lang="en-SG" dirty="0" smtClean="0"/>
+              <a:t>IV will be repeated in busy </a:t>
+            </a:r>
+            <a:r>
+              <a:rPr lang="en-SG" dirty="0" err="1" smtClean="0"/>
+              <a:t>wifi</a:t>
+            </a:r>
+            <a:r>
+              <a:rPr lang="en-SG" dirty="0" smtClean="0"/>
+              <a:t> network -&gt; make WEP vulnerable to statistical attacks. Repeated IV can be used to determine key stream and break the encryption.</a:t>
+            </a:r>
+          </a:p>
+        </p:txBody>
+      </p:sp>
+    </p:spTree>
+  </p:cSld>
+  <p:clrMapOvr>
+    <a:masterClrMapping/>
+  </p:clrMapOvr>
+</p:sld>
+</file>
+
+<file path=ppt/slides/slide22.xml><?xml version="1.0" encoding="utf-8"?>
+<p:sld xmlns:a="http://schemas.openxmlformats.org/drawingml/2006/main" xmlns:r="http://schemas.openxmlformats.org/officeDocument/2006/relationships" xmlns:p="http://schemas.openxmlformats.org/presentationml/2006/main">
+  <p:cSld>
+    <p:spTree>
+      <p:nvGrpSpPr>
+        <p:cNvPr id="1" name=""/>
+        <p:cNvGrpSpPr/>
+        <p:nvPr/>
+      </p:nvGrpSpPr>
+      <p:grpSpPr>
+        <a:xfrm>
+          <a:off x="0" y="0"/>
+          <a:ext cx="0" cy="0"/>
+          <a:chOff x="0" y="0"/>
+          <a:chExt cx="0" cy="0"/>
+        </a:xfrm>
+      </p:grpSpPr>
+      <p:sp>
+        <p:nvSpPr>
+          <p:cNvPr id="2" name="Title 1"/>
+          <p:cNvSpPr>
+            <a:spLocks noGrp="1"/>
+          </p:cNvSpPr>
+          <p:nvPr>
+            <p:ph type="title"/>
+          </p:nvPr>
+        </p:nvSpPr>
+        <p:spPr/>
+        <p:txBody>
+          <a:bodyPr/>
+          <a:lstStyle/>
+          <a:p>
+            <a:endParaRPr lang="en-US"/>
+          </a:p>
+        </p:txBody>
+      </p:sp>
+      <p:sp>
+        <p:nvSpPr>
+          <p:cNvPr id="3" name="Content Placeholder 2"/>
+          <p:cNvSpPr>
+            <a:spLocks noGrp="1"/>
+          </p:cNvSpPr>
+          <p:nvPr>
+            <p:ph idx="1"/>
+          </p:nvPr>
+        </p:nvSpPr>
+        <p:spPr/>
+        <p:txBody>
+          <a:bodyPr>
+            <a:normAutofit/>
+          </a:bodyPr>
+          <a:lstStyle/>
+          <a:p>
+            <a:r>
+              <a:rPr lang="en-SG" dirty="0" smtClean="0"/>
+              <a:t>WEP password is 5 or 10 or 13 or 26?</a:t>
+            </a:r>
+          </a:p>
+          <a:p>
+            <a:r>
+              <a:rPr lang="en-SG" dirty="0" smtClean="0"/>
+              <a:t>64 or 128-bit key</a:t>
+            </a:r>
+            <a:endParaRPr lang="en-US" dirty="0" smtClean="0"/>
+          </a:p>
+          <a:p>
+            <a:r>
+              <a:rPr lang="en-US" dirty="0" err="1" smtClean="0">
+                <a:solidFill>
+                  <a:srgbClr val="FF0000"/>
+                </a:solidFill>
+              </a:rPr>
+              <a:t>airodump-ng</a:t>
+            </a:r>
+            <a:r>
+              <a:rPr lang="en-US" dirty="0" smtClean="0"/>
+              <a:t> --</a:t>
+            </a:r>
+            <a:r>
+              <a:rPr lang="en-US" dirty="0" err="1" smtClean="0"/>
+              <a:t>bssid</a:t>
+            </a:r>
+            <a:r>
+              <a:rPr lang="en-US" dirty="0" smtClean="0"/>
+              <a:t> 10:62:EB:3C:EC:B9 --channel 4 --write test </a:t>
+            </a:r>
+            <a:r>
+              <a:rPr lang="en-US" dirty="0" smtClean="0"/>
+              <a:t>wlan0 wait for #Data to be &gt;100k before trying to crack.</a:t>
+            </a:r>
+          </a:p>
+          <a:p>
+            <a:r>
+              <a:rPr lang="en-SG" dirty="0" err="1" smtClean="0"/>
+              <a:t>aircrack-ng</a:t>
+            </a:r>
+            <a:r>
+              <a:rPr lang="en-SG" dirty="0" smtClean="0"/>
+              <a:t> test-01.cap to crack the </a:t>
+            </a:r>
+            <a:r>
+              <a:rPr lang="en-SG" dirty="0" err="1" smtClean="0"/>
+              <a:t>wifi</a:t>
+            </a:r>
+            <a:r>
+              <a:rPr lang="en-SG" dirty="0" smtClean="0"/>
+              <a:t> network key.</a:t>
+            </a:r>
+          </a:p>
+        </p:txBody>
+      </p:sp>
+    </p:spTree>
+  </p:cSld>
+  <p:clrMapOvr>
+    <a:masterClrMapping/>
+  </p:clrMapOvr>
+</p:sld>
+</file>
+
+<file path=ppt/slides/slide23.xml><?xml version="1.0" encoding="utf-8"?>
+<p:sld xmlns:a="http://schemas.openxmlformats.org/drawingml/2006/main" xmlns:r="http://schemas.openxmlformats.org/officeDocument/2006/relationships" xmlns:p="http://schemas.openxmlformats.org/presentationml/2006/main">
+  <p:cSld>
+    <p:spTree>
+      <p:nvGrpSpPr>
+        <p:cNvPr id="1" name=""/>
+        <p:cNvGrpSpPr/>
+        <p:nvPr/>
+      </p:nvGrpSpPr>
+      <p:grpSpPr>
+        <a:xfrm>
+          <a:off x="0" y="0"/>
+          <a:ext cx="0" cy="0"/>
+          <a:chOff x="0" y="0"/>
+          <a:chExt cx="0" cy="0"/>
+        </a:xfrm>
+      </p:grpSpPr>
+      <p:sp>
+        <p:nvSpPr>
+          <p:cNvPr id="2" name="Title 1"/>
+          <p:cNvSpPr>
+            <a:spLocks noGrp="1"/>
+          </p:cNvSpPr>
+          <p:nvPr>
+            <p:ph type="title"/>
+          </p:nvPr>
+        </p:nvSpPr>
+        <p:spPr/>
+        <p:txBody>
+          <a:bodyPr/>
+          <a:lstStyle/>
+          <a:p>
+            <a:endParaRPr lang="en-US"/>
+          </a:p>
+        </p:txBody>
+      </p:sp>
+      <p:pic>
+        <p:nvPicPr>
+          <p:cNvPr id="4" name="Picture 2"/>
+          <p:cNvPicPr>
+            <a:picLocks noGrp="1" noChangeAspect="1" noChangeArrowheads="1"/>
+          </p:cNvPicPr>
+          <p:nvPr>
+            <p:ph idx="1"/>
+          </p:nvPr>
+        </p:nvPicPr>
+        <p:blipFill>
+          <a:blip r:embed="rId2"/>
+          <a:srcRect/>
+          <a:stretch>
+            <a:fillRect/>
+          </a:stretch>
+        </p:blipFill>
+        <p:spPr bwMode="auto">
+          <a:xfrm>
+            <a:off x="749099" y="1600200"/>
+            <a:ext cx="7645801" cy="4525963"/>
+          </a:xfrm>
+          <a:prstGeom prst="rect">
+            <a:avLst/>
+          </a:prstGeom>
+          <a:noFill/>
+          <a:ln w="9525">
+            <a:noFill/>
+            <a:miter lim="800000"/>
+            <a:headEnd/>
+            <a:tailEnd/>
+          </a:ln>
+          <a:effectLst/>
+        </p:spPr>
+      </p:pic>
+      <p:sp>
+        <p:nvSpPr>
+          <p:cNvPr id="5" name="TextBox 4"/>
+          <p:cNvSpPr txBox="1"/>
+          <p:nvPr/>
+        </p:nvSpPr>
+        <p:spPr>
+          <a:xfrm>
+            <a:off x="357158" y="6215082"/>
+            <a:ext cx="7117589" cy="646331"/>
+          </a:xfrm>
+          <a:prstGeom prst="rect">
+            <a:avLst/>
+          </a:prstGeom>
+          <a:noFill/>
+        </p:spPr>
+        <p:txBody>
+          <a:bodyPr wrap="none" rtlCol="0">
+            <a:spAutoFit/>
+          </a:bodyPr>
+          <a:lstStyle/>
+          <a:p>
+            <a:r>
+              <a:rPr lang="en-SG" dirty="0" smtClean="0"/>
+              <a:t>Use 3132313434 as it will always be there. ASCII: 12144 may not be there.</a:t>
+            </a:r>
+          </a:p>
+          <a:p>
+            <a:r>
+              <a:rPr lang="en-SG" dirty="0" smtClean="0"/>
+              <a:t>Using 3132313434 or 12144 can both work for the password</a:t>
+            </a:r>
+            <a:endParaRPr lang="en-US" dirty="0"/>
+          </a:p>
+        </p:txBody>
+      </p:sp>
+    </p:spTree>
+  </p:cSld>
+  <p:clrMapOvr>
+    <a:masterClrMapping/>
+  </p:clrMapOvr>
+</p:sld>
+</file>
+
+<file path=ppt/slides/slide24.xml><?xml version="1.0" encoding="utf-8"?>
+<p:sld xmlns:a="http://schemas.openxmlformats.org/drawingml/2006/main" xmlns:r="http://schemas.openxmlformats.org/officeDocument/2006/relationships" xmlns:p="http://schemas.openxmlformats.org/presentationml/2006/main">
+  <p:cSld>
+    <p:spTree>
+      <p:nvGrpSpPr>
+        <p:cNvPr id="1" name=""/>
+        <p:cNvGrpSpPr/>
+        <p:nvPr/>
+      </p:nvGrpSpPr>
+      <p:grpSpPr>
+        <a:xfrm>
+          <a:off x="0" y="0"/>
+          <a:ext cx="0" cy="0"/>
+          <a:chOff x="0" y="0"/>
+          <a:chExt cx="0" cy="0"/>
+        </a:xfrm>
+      </p:grpSpPr>
+      <p:sp>
+        <p:nvSpPr>
+          <p:cNvPr id="2" name="Title 1"/>
+          <p:cNvSpPr>
+            <a:spLocks noGrp="1"/>
+          </p:cNvSpPr>
+          <p:nvPr>
+            <p:ph type="title"/>
+          </p:nvPr>
+        </p:nvSpPr>
+        <p:spPr/>
+        <p:txBody>
+          <a:bodyPr/>
+          <a:lstStyle/>
+          <a:p>
+            <a:endParaRPr lang="en-US"/>
+          </a:p>
+        </p:txBody>
+      </p:sp>
+      <p:sp>
+        <p:nvSpPr>
+          <p:cNvPr id="3" name="Content Placeholder 2"/>
+          <p:cNvSpPr>
+            <a:spLocks noGrp="1"/>
+          </p:cNvSpPr>
+          <p:nvPr>
+            <p:ph idx="1"/>
+          </p:nvPr>
+        </p:nvSpPr>
+        <p:spPr/>
+        <p:txBody>
+          <a:bodyPr>
+            <a:normAutofit fontScale="70000" lnSpcReduction="20000"/>
+          </a:bodyPr>
+          <a:lstStyle/>
+          <a:p>
+            <a:r>
+              <a:rPr lang="en-SG" dirty="0" smtClean="0"/>
+              <a:t>Possible problem is not busy network will not generate many useful data. Need to wait very long to have sufficient data.</a:t>
+            </a:r>
+          </a:p>
+          <a:p>
+            <a:r>
+              <a:rPr lang="en-SG" dirty="0" smtClean="0"/>
+              <a:t>Solution: Force router to generate new IV by doing fake authentication. Associate with router even though u have not connected to it (know the </a:t>
+            </a:r>
+            <a:r>
+              <a:rPr lang="en-SG" dirty="0" err="1" smtClean="0"/>
+              <a:t>wifi</a:t>
+            </a:r>
+            <a:r>
+              <a:rPr lang="en-SG" dirty="0" smtClean="0"/>
+              <a:t> network key). Don’t ignore me, communicate with me.</a:t>
+            </a:r>
+            <a:endParaRPr lang="en-US" dirty="0" smtClean="0"/>
+          </a:p>
+          <a:p>
+            <a:r>
+              <a:rPr lang="en-SG" dirty="0" err="1" smtClean="0"/>
+              <a:t>airodump-ng</a:t>
+            </a:r>
+            <a:r>
+              <a:rPr lang="en-SG" dirty="0" smtClean="0"/>
+              <a:t> --</a:t>
+            </a:r>
+            <a:r>
+              <a:rPr lang="en-SG" dirty="0" err="1" smtClean="0"/>
+              <a:t>bssid</a:t>
+            </a:r>
+            <a:r>
+              <a:rPr lang="en-SG" dirty="0" smtClean="0"/>
+              <a:t> 10:62:EB:3C:EC:B9 --channel 4 --write test </a:t>
+            </a:r>
+            <a:r>
+              <a:rPr lang="en-SG" dirty="0" smtClean="0"/>
+              <a:t>wlan0</a:t>
+            </a:r>
+          </a:p>
+          <a:p>
+            <a:r>
+              <a:rPr lang="en-SG" dirty="0" err="1" smtClean="0"/>
+              <a:t>aireplay-ng</a:t>
+            </a:r>
+            <a:r>
+              <a:rPr lang="en-SG" dirty="0" smtClean="0"/>
+              <a:t> --</a:t>
+            </a:r>
+            <a:r>
+              <a:rPr lang="en-SG" dirty="0" err="1" smtClean="0"/>
+              <a:t>fakeauth</a:t>
+            </a:r>
+            <a:r>
+              <a:rPr lang="en-SG" dirty="0" smtClean="0"/>
+              <a:t> 0 –a &lt;</a:t>
+            </a:r>
+            <a:r>
+              <a:rPr lang="en-SG" dirty="0" err="1" smtClean="0"/>
+              <a:t>wifi_network_bssid</a:t>
+            </a:r>
+            <a:r>
+              <a:rPr lang="en-SG" dirty="0" smtClean="0"/>
+              <a:t>&gt; -h &lt;</a:t>
+            </a:r>
+            <a:r>
+              <a:rPr lang="en-SG" dirty="0" err="1" smtClean="0"/>
+              <a:t>my_wifi_adapter_mac</a:t>
+            </a:r>
+            <a:r>
+              <a:rPr lang="en-SG" dirty="0" smtClean="0"/>
+              <a:t>&gt; wlan0</a:t>
+            </a:r>
+          </a:p>
+          <a:p>
+            <a:r>
+              <a:rPr lang="en-SG" dirty="0" smtClean="0"/>
+              <a:t>After u do </a:t>
+            </a:r>
+            <a:r>
+              <a:rPr lang="en-SG" dirty="0" err="1" smtClean="0"/>
+              <a:t>aireplay-ng</a:t>
+            </a:r>
+            <a:r>
+              <a:rPr lang="en-SG" dirty="0" smtClean="0"/>
+              <a:t>, the AUTH will be OPN.</a:t>
+            </a:r>
+          </a:p>
+          <a:p>
+            <a:r>
+              <a:rPr lang="en-SG" dirty="0" smtClean="0"/>
+              <a:t>To find &lt;</a:t>
+            </a:r>
+            <a:r>
+              <a:rPr lang="en-SG" dirty="0" err="1" smtClean="0"/>
+              <a:t>my_wifi_adapter_mac</a:t>
+            </a:r>
+            <a:r>
+              <a:rPr lang="en-SG" dirty="0" smtClean="0"/>
+              <a:t>&gt;, </a:t>
+            </a:r>
+            <a:r>
+              <a:rPr lang="en-SG" dirty="0" err="1" smtClean="0"/>
+              <a:t>ifconfig</a:t>
+            </a:r>
+            <a:r>
+              <a:rPr lang="en-SG" dirty="0" smtClean="0"/>
+              <a:t>, look at </a:t>
+            </a:r>
+            <a:r>
+              <a:rPr lang="en-SG" dirty="0" err="1" smtClean="0"/>
+              <a:t>unspec</a:t>
+            </a:r>
+            <a:r>
+              <a:rPr lang="en-SG" dirty="0" smtClean="0"/>
+              <a:t> first 6 Bytes (no ether as it is in monitor mode), convert - to :</a:t>
+            </a:r>
+          </a:p>
+          <a:p>
+            <a:endParaRPr lang="en-US" dirty="0"/>
+          </a:p>
+        </p:txBody>
+      </p:sp>
+    </p:spTree>
+  </p:cSld>
+  <p:clrMapOvr>
+    <a:masterClrMapping/>
+  </p:clrMapOvr>
+</p:sld>
+</file>
+
+<file path=ppt/slides/slide25.xml><?xml version="1.0" encoding="utf-8"?>
+<p:sld xmlns:a="http://schemas.openxmlformats.org/drawingml/2006/main" xmlns:r="http://schemas.openxmlformats.org/officeDocument/2006/relationships" xmlns:p="http://schemas.openxmlformats.org/presentationml/2006/main">
+  <p:cSld>
+    <p:spTree>
+      <p:nvGrpSpPr>
+        <p:cNvPr id="1" name=""/>
+        <p:cNvGrpSpPr/>
+        <p:nvPr/>
+      </p:nvGrpSpPr>
+      <p:grpSpPr>
+        <a:xfrm>
+          <a:off x="0" y="0"/>
+          <a:ext cx="0" cy="0"/>
+          <a:chOff x="0" y="0"/>
+          <a:chExt cx="0" cy="0"/>
+        </a:xfrm>
+      </p:grpSpPr>
+      <p:sp>
+        <p:nvSpPr>
+          <p:cNvPr id="2" name="Title 1"/>
+          <p:cNvSpPr>
+            <a:spLocks noGrp="1"/>
+          </p:cNvSpPr>
+          <p:nvPr>
+            <p:ph type="title"/>
+          </p:nvPr>
+        </p:nvSpPr>
+        <p:spPr/>
+        <p:txBody>
+          <a:bodyPr/>
+          <a:lstStyle/>
+          <a:p>
+            <a:endParaRPr lang="en-US"/>
+          </a:p>
+        </p:txBody>
+      </p:sp>
+      <p:sp>
+        <p:nvSpPr>
+          <p:cNvPr id="3" name="Content Placeholder 2"/>
+          <p:cNvSpPr>
+            <a:spLocks noGrp="1"/>
+          </p:cNvSpPr>
+          <p:nvPr>
+            <p:ph idx="1"/>
+          </p:nvPr>
+        </p:nvSpPr>
+        <p:spPr/>
+        <p:txBody>
+          <a:bodyPr>
+            <a:normAutofit fontScale="77500" lnSpcReduction="20000"/>
+          </a:bodyPr>
+          <a:lstStyle/>
+          <a:p>
+            <a:r>
+              <a:rPr lang="en-SG" dirty="0" smtClean="0"/>
+              <a:t>After associating with router, u can communicate with it and it will not ignore us. Use this communication to force it to generate new IV.</a:t>
+            </a:r>
+          </a:p>
+          <a:p>
+            <a:r>
+              <a:rPr lang="en-SG" dirty="0" smtClean="0"/>
+              <a:t>Use </a:t>
+            </a:r>
+            <a:r>
+              <a:rPr lang="en-SG" dirty="0" err="1" smtClean="0"/>
+              <a:t>arp</a:t>
+            </a:r>
+            <a:r>
+              <a:rPr lang="en-SG" dirty="0" smtClean="0"/>
+              <a:t> request replay attack (most reliable and simple)</a:t>
+            </a:r>
+          </a:p>
+          <a:p>
+            <a:pPr lvl="1"/>
+            <a:r>
+              <a:rPr lang="en-SG" dirty="0" smtClean="0"/>
+              <a:t>Wait for an ARP packet</a:t>
+            </a:r>
+          </a:p>
+          <a:p>
+            <a:pPr lvl="1"/>
+            <a:r>
+              <a:rPr lang="en-SG" dirty="0" smtClean="0"/>
+              <a:t>Capture it and replay it (re-transmit it)</a:t>
+            </a:r>
+          </a:p>
+          <a:p>
+            <a:pPr lvl="1"/>
+            <a:r>
+              <a:rPr lang="en-SG" dirty="0" smtClean="0"/>
+              <a:t>Cause the router to produce another packet with a new IV</a:t>
+            </a:r>
+          </a:p>
+          <a:p>
+            <a:pPr lvl="1"/>
+            <a:r>
+              <a:rPr lang="en-SG" dirty="0" smtClean="0"/>
+              <a:t>repeat</a:t>
+            </a:r>
+          </a:p>
+          <a:p>
+            <a:r>
+              <a:rPr lang="en-SG" dirty="0" err="1" smtClean="0"/>
+              <a:t>aireplay-ng</a:t>
+            </a:r>
+            <a:r>
+              <a:rPr lang="en-SG" dirty="0" smtClean="0"/>
+              <a:t> </a:t>
+            </a:r>
+            <a:r>
+              <a:rPr lang="en-SG" dirty="0" smtClean="0"/>
+              <a:t>--</a:t>
+            </a:r>
+            <a:r>
+              <a:rPr lang="en-SG" dirty="0" err="1" smtClean="0"/>
+              <a:t>arpreplay</a:t>
+            </a:r>
+            <a:r>
+              <a:rPr lang="en-SG" dirty="0" smtClean="0"/>
+              <a:t> -b </a:t>
+            </a:r>
+            <a:r>
+              <a:rPr lang="en-SG" dirty="0" smtClean="0"/>
+              <a:t>&lt;</a:t>
+            </a:r>
+            <a:r>
+              <a:rPr lang="en-SG" dirty="0" err="1" smtClean="0"/>
+              <a:t>wifi_network_bssid</a:t>
+            </a:r>
+            <a:r>
+              <a:rPr lang="en-SG" dirty="0" smtClean="0"/>
+              <a:t>&gt; -h &lt;</a:t>
+            </a:r>
+            <a:r>
+              <a:rPr lang="en-SG" dirty="0" err="1" smtClean="0"/>
+              <a:t>my_wifi_adapter_mac</a:t>
+            </a:r>
+            <a:r>
+              <a:rPr lang="en-SG" dirty="0" smtClean="0"/>
+              <a:t>&gt; </a:t>
+            </a:r>
+            <a:r>
+              <a:rPr lang="en-SG" dirty="0" smtClean="0"/>
+              <a:t>wlan0</a:t>
+            </a:r>
+          </a:p>
+          <a:p>
+            <a:r>
+              <a:rPr lang="en-SG" dirty="0" smtClean="0"/>
+              <a:t>This method has slow ARP request packet generation rate compared to the video.</a:t>
+            </a:r>
+            <a:endParaRPr lang="en-SG" dirty="0" smtClean="0"/>
+          </a:p>
+          <a:p>
             <a:endParaRPr lang="en-US" dirty="0"/>
           </a:p>
         </p:txBody>
